--- a/docs/content/descriptive_stats/descriptive_stats_lecture.pptx
+++ b/docs/content/descriptive_stats/descriptive_stats_lecture.pptx
@@ -39,6 +39,10 @@
     <p:sldId id="287" r:id="rId33"/>
     <p:sldId id="288" r:id="rId34"/>
     <p:sldId id="289" r:id="rId35"/>
+    <p:sldId id="290" r:id="rId36"/>
+    <p:sldId id="291" r:id="rId37"/>
+    <p:sldId id="292" r:id="rId38"/>
+    <p:sldId id="293" r:id="rId39"/>
   </p:sldIdLst>
   <p:sldSz cx="9144000" cy="5143500" type="screen16x9"/>
   <p:notesSz cx="6858000" cy="9144000"/>
@@ -3761,7 +3765,7 @@
               <a:rPr>
                 <a:latin typeface="Courier"/>
               </a:rPr>
-              <a:t>[1] 5.992754</a:t>
+              <a:t>[1] 7.740415</a:t>
             </a:r>
           </a:p>
           <a:p>
@@ -3795,7 +3799,7 @@
               <a:rPr>
                 <a:latin typeface="Courier"/>
               </a:rPr>
-              <a:t>[1] 2.44801</a:t>
+              <a:t>[1] 2.78216</a:t>
             </a:r>
           </a:p>
           <a:p>
@@ -3829,7 +3833,7 @@
               <a:rPr>
                 <a:latin typeface="Courier"/>
               </a:rPr>
-              <a:t>[1] 3.644928</a:t>
+              <a:t>[1] 6.731238</a:t>
             </a:r>
           </a:p>
           <a:p>
@@ -3863,7 +3867,7 @@
               <a:rPr>
                 <a:latin typeface="Courier"/>
               </a:rPr>
-              <a:t>[1] 1.909169</a:t>
+              <a:t>[1] 2.594463</a:t>
             </a:r>
           </a:p>
           <a:p>
@@ -4068,7 +4072,7 @@
               <a:rPr>
                 <a:latin typeface="Courier"/>
               </a:rPr>
-              <a:t>[1] 16 25</a:t>
+              <a:t>[1]  7.23 20.71</a:t>
             </a:r>
           </a:p>
           <a:p>
@@ -4147,7 +4151,7 @@
               <a:rPr>
                 <a:latin typeface="Courier"/>
               </a:rPr>
-              <a:t>[1] 9</a:t>
+              <a:t>[1] 13.48</a:t>
             </a:r>
           </a:p>
           <a:p>
@@ -4190,8 +4194,8 @@
               <a:rPr>
                 <a:latin typeface="Courier"/>
               </a:rPr>
-              <a:t>   0%   25%   50%   75%  100% 
-16.00 18.75 20.50 21.50 25.00 </a:t>
+              <a:t>    0%    25%    50%    75%   100% 
+ 7.230 11.745 14.155 15.815 20.710 </a:t>
             </a:r>
           </a:p>
           <a:p>
@@ -4234,7 +4238,7 @@
               <a:rPr>
                 <a:latin typeface="Courier"/>
               </a:rPr>
-              <a:t>[1] 2.75</a:t>
+              <a:t>[1] 4.07</a:t>
             </a:r>
           </a:p>
           <a:p>
@@ -4629,8 +4633,8 @@
               <a:rPr>
                 <a:latin typeface="Courier"/>
               </a:rPr>
-              <a:t>   0%   25%   50%   75%  100% 
-12.00 13.75 15.00 16.00 19.00 </a:t>
+              <a:t>    0%    25%    50%    75%   100% 
+10.710 13.160 15.370 17.305 19.520 </a:t>
             </a:r>
           </a:p>
           <a:p>
@@ -4664,7 +4668,7 @@
               <a:rPr>
                 <a:latin typeface="Courier"/>
               </a:rPr>
-              <a:t>[1] 2.25</a:t>
+              <a:t>[1] 4.145</a:t>
             </a:r>
           </a:p>
         </p:txBody>
@@ -5558,7 +5562,7 @@
                 </a:solidFill>
                 <a:latin typeface="Courier"/>
               </a:rPr>
-              <a:t>) </a:t>
+              <a:t>)</a:t>
             </a:r>
           </a:p>
           <a:p>
@@ -5570,20 +5574,6 @@
                 <a:latin typeface="Courier"/>
               </a:rPr>
               <a:t>[1] 0.931</a:t>
-            </a:r>
-          </a:p>
-          <a:p>
-            <a:pPr lvl="0" indent="0">
-              <a:buNone/>
-            </a:pPr>
-            <a:r>
-              <a:rPr>
-                <a:solidFill>
-                  <a:srgbClr val="5E5E5E"/>
-                </a:solidFill>
-                <a:latin typeface="Courier"/>
-              </a:rPr>
-              <a:t># note base r rounding is really odd - use round_half_up from janitor</a:t>
             </a:r>
           </a:p>
         </p:txBody>
@@ -6270,7 +6260,7 @@
               <a:rPr>
                 <a:latin typeface="Courier"/>
               </a:rPr>
-              <a:t>[1] 24</a:t>
+              <a:t>[1] 32</a:t>
             </a:r>
           </a:p>
           <a:p>
@@ -6295,7 +6285,7 @@
               <a:rPr>
                 <a:latin typeface="Courier"/>
               </a:rPr>
-              <a:t>[1] 24</a:t>
+              <a:t>[1] 32</a:t>
             </a:r>
           </a:p>
         </p:txBody>
@@ -7073,7 +7063,7 @@
                 </a:solidFill>
                 <a:latin typeface="Courier"/>
               </a:rPr>
-              <a:t>se_shady  &lt;- </a:t>
+              <a:t>se_shady &lt;- </a:t>
             </a:r>
             <a:r>
               <a:rPr>
@@ -7091,7 +7081,43 @@
                 </a:solidFill>
                 <a:latin typeface="Courier"/>
               </a:rPr>
-              <a:t>(shady_lengths)  </a:t>
+              <a:t>(shady_lengths, </a:t>
+            </a:r>
+            <a:r>
+              <a:rPr>
+                <a:solidFill>
+                  <a:srgbClr val="657422"/>
+                </a:solidFill>
+                <a:latin typeface="Courier"/>
+              </a:rPr>
+              <a:t>na.rm =</a:t>
+            </a:r>
+            <a:r>
+              <a:rPr>
+                <a:solidFill>
+                  <a:srgbClr val="003B4F"/>
+                </a:solidFill>
+                <a:latin typeface="Courier"/>
+              </a:rPr>
+              <a:t> </a:t>
+            </a:r>
+            <a:r>
+              <a:rPr>
+                <a:solidFill>
+                  <a:srgbClr val="8F5902"/>
+                </a:solidFill>
+                <a:latin typeface="Courier"/>
+              </a:rPr>
+              <a:t>TRUE</a:t>
+            </a:r>
+            <a:r>
+              <a:rPr>
+                <a:solidFill>
+                  <a:srgbClr val="003B4F"/>
+                </a:solidFill>
+                <a:latin typeface="Courier"/>
+              </a:rPr>
+              <a:t>) </a:t>
             </a:r>
             <a:r>
               <a:rPr>
@@ -7155,7 +7181,43 @@
                 </a:solidFill>
                 <a:latin typeface="Courier"/>
               </a:rPr>
-              <a:t>(sunny_lengths) </a:t>
+              <a:t>(sunny_lengths, </a:t>
+            </a:r>
+            <a:r>
+              <a:rPr>
+                <a:solidFill>
+                  <a:srgbClr val="657422"/>
+                </a:solidFill>
+                <a:latin typeface="Courier"/>
+              </a:rPr>
+              <a:t>na.rm =</a:t>
+            </a:r>
+            <a:r>
+              <a:rPr>
+                <a:solidFill>
+                  <a:srgbClr val="003B4F"/>
+                </a:solidFill>
+                <a:latin typeface="Courier"/>
+              </a:rPr>
+              <a:t> </a:t>
+            </a:r>
+            <a:r>
+              <a:rPr>
+                <a:solidFill>
+                  <a:srgbClr val="8F5902"/>
+                </a:solidFill>
+                <a:latin typeface="Courier"/>
+              </a:rPr>
+              <a:t>TRUE</a:t>
+            </a:r>
+            <a:r>
+              <a:rPr>
+                <a:solidFill>
+                  <a:srgbClr val="003B4F"/>
+                </a:solidFill>
+                <a:latin typeface="Courier"/>
+              </a:rPr>
+              <a:t>) </a:t>
             </a:r>
             <a:r>
               <a:rPr>
@@ -7240,7 +7302,7 @@
               <a:rPr>
                 <a:latin typeface="Courier"/>
               </a:rPr>
-              <a:t>[1] 0.5</a:t>
+              <a:t>[1] 0.49</a:t>
             </a:r>
           </a:p>
           <a:p>
@@ -7292,7 +7354,7 @@
               <a:rPr>
                 <a:latin typeface="Courier"/>
               </a:rPr>
-              <a:t>[1] 0.39</a:t>
+              <a:t>[1] 0.46</a:t>
             </a:r>
           </a:p>
           <a:p>
@@ -8243,11 +8305,11 @@
                 <a:latin typeface="Courier"/>
               </a:rPr>
               <a:t>--- Shady side ---
- n      = 24 
- Mean   = 20.42 
- Median = 20.5 
- SD     = 2.45 
- SE     = 0.5 </a:t>
+ n      = 32 
+ Mean   = 14.12 
+ Median = 14.16 
+ SD     = 2.78 
+ SE     = 0.49 </a:t>
             </a:r>
           </a:p>
         </p:txBody>
@@ -8652,7 +8714,7 @@
                       </a:pPr>
                       <a:r>
                         <a:rPr/>
-                        <a:t>48</a:t>
+                        <a:t>64</a:t>
                       </a:r>
                     </a:p>
                   </a:txBody>
@@ -8768,7 +8830,7 @@
                       </a:pPr>
                       <a:r>
                         <a:rPr/>
-                        <a:t>4</a:t>
+                        <a:t>3</a:t>
                       </a:r>
                     </a:p>
                   </a:txBody>
@@ -8800,7 +8862,7 @@
                       </a:pPr>
                       <a:r>
                         <a:rPr/>
-                        <a:t>2</a:t>
+                        <a:t>3</a:t>
                       </a:r>
                     </a:p>
                   </a:txBody>
@@ -9096,7 +9158,7 @@
                       </a:pPr>
                       <a:r>
                         <a:rPr/>
-                        <a:t>date</a:t>
+                        <a:t>source_file</a:t>
                       </a:r>
                     </a:p>
                   </a:txBody>
@@ -9141,7 +9203,7 @@
                       </a:pPr>
                       <a:r>
                         <a:rPr/>
-                        <a:t>7</a:t>
+                        <a:t>19</a:t>
                       </a:r>
                     </a:p>
                   </a:txBody>
@@ -9156,129 +9218,7 @@
                       </a:pPr>
                       <a:r>
                         <a:rPr/>
-                        <a:t>7</a:t>
-                      </a:r>
-                    </a:p>
-                  </a:txBody>
-                </a:tc>
-                <a:tc>
-                  <a:txBody>
-                    <a:bodyPr/>
-                    <a:lstStyle/>
-                    <a:p>
-                      <a:pPr lvl="0" indent="0" marL="0" algn="r">
-                        <a:buNone/>
-                      </a:pPr>
-                      <a:r>
-                        <a:rPr/>
-                        <a:t>0</a:t>
-                      </a:r>
-                    </a:p>
-                  </a:txBody>
-                </a:tc>
-                <a:tc>
-                  <a:txBody>
-                    <a:bodyPr/>
-                    <a:lstStyle/>
-                    <a:p>
-                      <a:pPr lvl="0" indent="0" marL="0" algn="r">
-                        <a:buNone/>
-                      </a:pPr>
-                      <a:r>
-                        <a:rPr/>
-                        <a:t>1</a:t>
-                      </a:r>
-                    </a:p>
-                  </a:txBody>
-                </a:tc>
-                <a:tc>
-                  <a:txBody>
-                    <a:bodyPr/>
-                    <a:lstStyle/>
-                    <a:p>
-                      <a:pPr lvl="0" indent="0" marL="0" algn="r">
-                        <a:buNone/>
-                      </a:pPr>
-                      <a:r>
-                        <a:rPr/>
-                        <a:t>0</a:t>
-                      </a:r>
-                    </a:p>
-                  </a:txBody>
-                </a:tc>
-              </a:tr>
-              <a:tr h="0">
-                <a:tc>
-                  <a:txBody>
-                    <a:bodyPr/>
-                    <a:lstStyle/>
-                    <a:p>
-                      <a:pPr lvl="0" indent="0" marL="0" algn="l">
-                        <a:buNone/>
-                      </a:pPr>
-                      <a:r>
-                        <a:rPr/>
-                        <a:t>group</a:t>
-                      </a:r>
-                    </a:p>
-                  </a:txBody>
-                </a:tc>
-                <a:tc>
-                  <a:txBody>
-                    <a:bodyPr/>
-                    <a:lstStyle/>
-                    <a:p>
-                      <a:pPr lvl="0" indent="0" marL="0" algn="r">
-                        <a:buNone/>
-                      </a:pPr>
-                      <a:r>
-                        <a:rPr/>
-                        <a:t>0</a:t>
-                      </a:r>
-                    </a:p>
-                  </a:txBody>
-                </a:tc>
-                <a:tc>
-                  <a:txBody>
-                    <a:bodyPr/>
-                    <a:lstStyle/>
-                    <a:p>
-                      <a:pPr lvl="0" indent="0" marL="0" algn="r">
-                        <a:buNone/>
-                      </a:pPr>
-                      <a:r>
-                        <a:rPr/>
-                        <a:t>1</a:t>
-                      </a:r>
-                    </a:p>
-                  </a:txBody>
-                </a:tc>
-                <a:tc>
-                  <a:txBody>
-                    <a:bodyPr/>
-                    <a:lstStyle/>
-                    <a:p>
-                      <a:pPr lvl="0" indent="0" marL="0" algn="r">
-                        <a:buNone/>
-                      </a:pPr>
-                      <a:r>
-                        <a:rPr/>
-                        <a:t>5</a:t>
-                      </a:r>
-                    </a:p>
-                  </a:txBody>
-                </a:tc>
-                <a:tc>
-                  <a:txBody>
-                    <a:bodyPr/>
-                    <a:lstStyle/>
-                    <a:p>
-                      <a:pPr lvl="0" indent="0" marL="0" algn="r">
-                        <a:buNone/>
-                      </a:pPr>
-                      <a:r>
-                        <a:rPr/>
-                        <a:t>11</a:t>
+                        <a:t>47</a:t>
                       </a:r>
                     </a:p>
                   </a:txBody>
@@ -9340,7 +9280,7 @@
                       </a:pPr>
                       <a:r>
                         <a:rPr/>
-                        <a:t>n_s</a:t>
+                        <a:t>team</a:t>
                       </a:r>
                     </a:p>
                   </a:txBody>
@@ -9385,7 +9325,7 @@
                       </a:pPr>
                       <a:r>
                         <a:rPr/>
-                        <a:t>1</a:t>
+                        <a:t>3</a:t>
                       </a:r>
                     </a:p>
                   </a:txBody>
@@ -9400,7 +9340,7 @@
                       </a:pPr>
                       <a:r>
                         <a:rPr/>
-                        <a:t>1</a:t>
+                        <a:t>10</a:t>
                       </a:r>
                     </a:p>
                   </a:txBody>
@@ -9430,7 +9370,7 @@
                       </a:pPr>
                       <a:r>
                         <a:rPr/>
-                        <a:t>2</a:t>
+                        <a:t>4</a:t>
                       </a:r>
                     </a:p>
                   </a:txBody>
@@ -9462,7 +9402,7 @@
                       </a:pPr>
                       <a:r>
                         <a:rPr/>
-                        <a:t>sun</a:t>
+                        <a:t>side</a:t>
                       </a:r>
                     </a:p>
                   </a:txBody>
@@ -9623,17 +9563,17 @@
                 <a:tableStyleId>{5C22544A-7EE6-4342-B048-85BDC9FD1C3A}</a:tableStyleId>
               </a:tblPr>
               <a:tblGrid>
-                <a:gridCol w="774700"/>
-                <a:gridCol w="558800"/>
-                <a:gridCol w="774700"/>
-                <a:gridCol w="330200"/>
-                <a:gridCol w="279400"/>
-                <a:gridCol w="165100"/>
-                <a:gridCol w="330200"/>
-                <a:gridCol w="279400"/>
-                <a:gridCol w="330200"/>
-                <a:gridCol w="279400"/>
-                <a:gridCol w="330200"/>
+                <a:gridCol w="863600"/>
+                <a:gridCol w="508000"/>
+                <a:gridCol w="711200"/>
+                <a:gridCol w="304800"/>
+                <a:gridCol w="254000"/>
+                <a:gridCol w="254000"/>
+                <a:gridCol w="304800"/>
+                <a:gridCol w="304800"/>
+                <a:gridCol w="304800"/>
+                <a:gridCol w="304800"/>
+                <a:gridCol w="304800"/>
               </a:tblGrid>
               <a:tr h="0">
                 <a:tc>
@@ -9824,7 +9764,7 @@
                       </a:pPr>
                       <a:r>
                         <a:rPr/>
-                        <a:t>tree_no</a:t>
+                        <a:t>replicate</a:t>
                       </a:r>
                     </a:p>
                   </a:txBody>
@@ -9869,7 +9809,7 @@
                       </a:pPr>
                       <a:r>
                         <a:rPr/>
-                        <a:t>2.50</a:t>
+                        <a:t>4.50</a:t>
                       </a:r>
                     </a:p>
                   </a:txBody>
@@ -9884,7 +9824,7 @@
                       </a:pPr>
                       <a:r>
                         <a:rPr/>
-                        <a:t>1.13</a:t>
+                        <a:t>2.31</a:t>
                       </a:r>
                     </a:p>
                   </a:txBody>
@@ -9899,7 +9839,7 @@
                       </a:pPr>
                       <a:r>
                         <a:rPr/>
-                        <a:t>1</a:t>
+                        <a:t>1.00</a:t>
                       </a:r>
                     </a:p>
                   </a:txBody>
@@ -9914,7 +9854,7 @@
                       </a:pPr>
                       <a:r>
                         <a:rPr/>
-                        <a:t>1.75</a:t>
+                        <a:t>2.75</a:t>
                       </a:r>
                     </a:p>
                   </a:txBody>
@@ -9929,7 +9869,7 @@
                       </a:pPr>
                       <a:r>
                         <a:rPr/>
-                        <a:t>2.5</a:t>
+                        <a:t>4.50</a:t>
                       </a:r>
                     </a:p>
                   </a:txBody>
@@ -9944,7 +9884,7 @@
                       </a:pPr>
                       <a:r>
                         <a:rPr/>
-                        <a:t>3.25</a:t>
+                        <a:t>6.25</a:t>
                       </a:r>
                     </a:p>
                   </a:txBody>
@@ -9959,7 +9899,7 @@
                       </a:pPr>
                       <a:r>
                         <a:rPr/>
-                        <a:t>4</a:t>
+                        <a:t>8.00</a:t>
                       </a:r>
                     </a:p>
                   </a:txBody>
@@ -9974,7 +9914,7 @@
                       </a:pPr>
                       <a:r>
                         <a:rPr/>
-                        <a:t>▇▇▁▇▇</a:t>
+                        <a:t>▇▃▇▃▇</a:t>
                       </a:r>
                     </a:p>
                   </a:txBody>
@@ -9991,7 +9931,7 @@
                       </a:pPr>
                       <a:r>
                         <a:rPr/>
-                        <a:t>length_mm</a:t>
+                        <a:t>needle_length_mm</a:t>
                       </a:r>
                     </a:p>
                   </a:txBody>
@@ -10036,7 +9976,7 @@
                       </a:pPr>
                       <a:r>
                         <a:rPr/>
-                        <a:t>17.67</a:t>
+                        <a:t>14.67</a:t>
                       </a:r>
                     </a:p>
                   </a:txBody>
@@ -10051,7 +9991,7 @@
                       </a:pPr>
                       <a:r>
                         <a:rPr/>
-                        <a:t>3.53</a:t>
+                        <a:t>2.72</a:t>
                       </a:r>
                     </a:p>
                   </a:txBody>
@@ -10066,7 +10006,7 @@
                       </a:pPr>
                       <a:r>
                         <a:rPr/>
-                        <a:t>12</a:t>
+                        <a:t>7.23</a:t>
                       </a:r>
                     </a:p>
                   </a:txBody>
@@ -10081,7 +10021,7 @@
                       </a:pPr>
                       <a:r>
                         <a:rPr/>
-                        <a:t>15.00</a:t>
+                        <a:t>12.88</a:t>
                       </a:r>
                     </a:p>
                   </a:txBody>
@@ -10096,7 +10036,7 @@
                       </a:pPr>
                       <a:r>
                         <a:rPr/>
-                        <a:t>17.5</a:t>
+                        <a:t>14.55</a:t>
                       </a:r>
                     </a:p>
                   </a:txBody>
@@ -10111,7 +10051,7 @@
                       </a:pPr>
                       <a:r>
                         <a:rPr/>
-                        <a:t>20.25</a:t>
+                        <a:t>16.83</a:t>
                       </a:r>
                     </a:p>
                   </a:txBody>
@@ -10126,7 +10066,7 @@
                       </a:pPr>
                       <a:r>
                         <a:rPr/>
-                        <a:t>25</a:t>
+                        <a:t>20.71</a:t>
                       </a:r>
                     </a:p>
                   </a:txBody>
@@ -10141,7 +10081,174 @@
                       </a:pPr>
                       <a:r>
                         <a:rPr/>
-                        <a:t>▆▇▅▆▃</a:t>
+                        <a:t>▁▅▇▇▂</a:t>
+                      </a:r>
+                    </a:p>
+                  </a:txBody>
+                </a:tc>
+              </a:tr>
+              <a:tr h="0">
+                <a:tc>
+                  <a:txBody>
+                    <a:bodyPr/>
+                    <a:lstStyle/>
+                    <a:p>
+                      <a:pPr lvl="0" indent="0" marL="0" algn="l">
+                        <a:buNone/>
+                      </a:pPr>
+                      <a:r>
+                        <a:rPr/>
+                        <a:t>needle_width_mm</a:t>
+                      </a:r>
+                    </a:p>
+                  </a:txBody>
+                </a:tc>
+                <a:tc>
+                  <a:txBody>
+                    <a:bodyPr/>
+                    <a:lstStyle/>
+                    <a:p>
+                      <a:pPr lvl="0" indent="0" marL="0" algn="r">
+                        <a:buNone/>
+                      </a:pPr>
+                      <a:r>
+                        <a:rPr/>
+                        <a:t>0</a:t>
+                      </a:r>
+                    </a:p>
+                  </a:txBody>
+                </a:tc>
+                <a:tc>
+                  <a:txBody>
+                    <a:bodyPr/>
+                    <a:lstStyle/>
+                    <a:p>
+                      <a:pPr lvl="0" indent="0" marL="0" algn="r">
+                        <a:buNone/>
+                      </a:pPr>
+                      <a:r>
+                        <a:rPr/>
+                        <a:t>1</a:t>
+                      </a:r>
+                    </a:p>
+                  </a:txBody>
+                </a:tc>
+                <a:tc>
+                  <a:txBody>
+                    <a:bodyPr/>
+                    <a:lstStyle/>
+                    <a:p>
+                      <a:pPr lvl="0" indent="0" marL="0" algn="r">
+                        <a:buNone/>
+                      </a:pPr>
+                      <a:r>
+                        <a:rPr/>
+                        <a:t>1.07</a:t>
+                      </a:r>
+                    </a:p>
+                  </a:txBody>
+                </a:tc>
+                <a:tc>
+                  <a:txBody>
+                    <a:bodyPr/>
+                    <a:lstStyle/>
+                    <a:p>
+                      <a:pPr lvl="0" indent="0" marL="0" algn="r">
+                        <a:buNone/>
+                      </a:pPr>
+                      <a:r>
+                        <a:rPr/>
+                        <a:t>0.21</a:t>
+                      </a:r>
+                    </a:p>
+                  </a:txBody>
+                </a:tc>
+                <a:tc>
+                  <a:txBody>
+                    <a:bodyPr/>
+                    <a:lstStyle/>
+                    <a:p>
+                      <a:pPr lvl="0" indent="0" marL="0" algn="r">
+                        <a:buNone/>
+                      </a:pPr>
+                      <a:r>
+                        <a:rPr/>
+                        <a:t>0.65</a:t>
+                      </a:r>
+                    </a:p>
+                  </a:txBody>
+                </a:tc>
+                <a:tc>
+                  <a:txBody>
+                    <a:bodyPr/>
+                    <a:lstStyle/>
+                    <a:p>
+                      <a:pPr lvl="0" indent="0" marL="0" algn="r">
+                        <a:buNone/>
+                      </a:pPr>
+                      <a:r>
+                        <a:rPr/>
+                        <a:t>0.96</a:t>
+                      </a:r>
+                    </a:p>
+                  </a:txBody>
+                </a:tc>
+                <a:tc>
+                  <a:txBody>
+                    <a:bodyPr/>
+                    <a:lstStyle/>
+                    <a:p>
+                      <a:pPr lvl="0" indent="0" marL="0" algn="r">
+                        <a:buNone/>
+                      </a:pPr>
+                      <a:r>
+                        <a:rPr/>
+                        <a:t>1.10</a:t>
+                      </a:r>
+                    </a:p>
+                  </a:txBody>
+                </a:tc>
+                <a:tc>
+                  <a:txBody>
+                    <a:bodyPr/>
+                    <a:lstStyle/>
+                    <a:p>
+                      <a:pPr lvl="0" indent="0" marL="0" algn="r">
+                        <a:buNone/>
+                      </a:pPr>
+                      <a:r>
+                        <a:rPr/>
+                        <a:t>1.22</a:t>
+                      </a:r>
+                    </a:p>
+                  </a:txBody>
+                </a:tc>
+                <a:tc>
+                  <a:txBody>
+                    <a:bodyPr/>
+                    <a:lstStyle/>
+                    <a:p>
+                      <a:pPr lvl="0" indent="0" marL="0" algn="r">
+                        <a:buNone/>
+                      </a:pPr>
+                      <a:r>
+                        <a:rPr/>
+                        <a:t>1.58</a:t>
+                      </a:r>
+                    </a:p>
+                  </a:txBody>
+                </a:tc>
+                <a:tc>
+                  <a:txBody>
+                    <a:bodyPr/>
+                    <a:lstStyle/>
+                    <a:p>
+                      <a:pPr lvl="0" indent="0" marL="0" algn="l">
+                        <a:buNone/>
+                      </a:pPr>
+                      <a:r>
+                        <a:rPr/>
+                        <a:t>▃▅▇▅▁</a:t>
                       </a:r>
                     </a:p>
                   </a:txBody>
@@ -10338,7 +10445,7 @@
                 </a:solidFill>
                 <a:latin typeface="Courier"/>
               </a:rPr>
-              <a:t>(length_mm, tree_no) </a:t>
+              <a:t>(needle_length_mm, needle_width_mm) </a:t>
             </a:r>
             <a:r>
               <a:rPr>
@@ -10430,7 +10537,7 @@
                       </a:pPr>
                       <a:r>
                         <a:rPr/>
-                        <a:t>select(pine_df, length_mm…</a:t>
+                        <a:t>select(pine_df, needle_le…</a:t>
                       </a:r>
                     </a:p>
                   </a:txBody>
@@ -10462,7 +10569,7 @@
                       </a:pPr>
                       <a:r>
                         <a:rPr/>
-                        <a:t>48</a:t>
+                        <a:t>64</a:t>
                       </a:r>
                     </a:p>
                   </a:txBody>
@@ -10724,17 +10831,17 @@
                 <a:tableStyleId>{5C22544A-7EE6-4342-B048-85BDC9FD1C3A}</a:tableStyleId>
               </a:tblPr>
               <a:tblGrid>
-                <a:gridCol w="774700"/>
-                <a:gridCol w="558800"/>
-                <a:gridCol w="774700"/>
-                <a:gridCol w="330200"/>
-                <a:gridCol w="279400"/>
-                <a:gridCol w="165100"/>
-                <a:gridCol w="330200"/>
-                <a:gridCol w="279400"/>
-                <a:gridCol w="330200"/>
-                <a:gridCol w="279400"/>
-                <a:gridCol w="330200"/>
+                <a:gridCol w="863600"/>
+                <a:gridCol w="508000"/>
+                <a:gridCol w="711200"/>
+                <a:gridCol w="304800"/>
+                <a:gridCol w="254000"/>
+                <a:gridCol w="254000"/>
+                <a:gridCol w="304800"/>
+                <a:gridCol w="304800"/>
+                <a:gridCol w="304800"/>
+                <a:gridCol w="304800"/>
+                <a:gridCol w="304800"/>
               </a:tblGrid>
               <a:tr h="0">
                 <a:tc>
@@ -10925,7 +11032,7 @@
                       </a:pPr>
                       <a:r>
                         <a:rPr/>
-                        <a:t>length_mm</a:t>
+                        <a:t>needle_length_mm</a:t>
                       </a:r>
                     </a:p>
                   </a:txBody>
@@ -10970,7 +11077,7 @@
                       </a:pPr>
                       <a:r>
                         <a:rPr/>
-                        <a:t>17.67</a:t>
+                        <a:t>14.67</a:t>
                       </a:r>
                     </a:p>
                   </a:txBody>
@@ -10985,7 +11092,7 @@
                       </a:pPr>
                       <a:r>
                         <a:rPr/>
-                        <a:t>3.53</a:t>
+                        <a:t>2.72</a:t>
                       </a:r>
                     </a:p>
                   </a:txBody>
@@ -11000,7 +11107,7 @@
                       </a:pPr>
                       <a:r>
                         <a:rPr/>
-                        <a:t>12</a:t>
+                        <a:t>7.23</a:t>
                       </a:r>
                     </a:p>
                   </a:txBody>
@@ -11015,7 +11122,7 @@
                       </a:pPr>
                       <a:r>
                         <a:rPr/>
-                        <a:t>15.00</a:t>
+                        <a:t>12.88</a:t>
                       </a:r>
                     </a:p>
                   </a:txBody>
@@ -11030,7 +11137,7 @@
                       </a:pPr>
                       <a:r>
                         <a:rPr/>
-                        <a:t>17.5</a:t>
+                        <a:t>14.55</a:t>
                       </a:r>
                     </a:p>
                   </a:txBody>
@@ -11045,7 +11152,7 @@
                       </a:pPr>
                       <a:r>
                         <a:rPr/>
-                        <a:t>20.25</a:t>
+                        <a:t>16.83</a:t>
                       </a:r>
                     </a:p>
                   </a:txBody>
@@ -11060,7 +11167,7 @@
                       </a:pPr>
                       <a:r>
                         <a:rPr/>
-                        <a:t>25</a:t>
+                        <a:t>20.71</a:t>
                       </a:r>
                     </a:p>
                   </a:txBody>
@@ -11075,7 +11182,7 @@
                       </a:pPr>
                       <a:r>
                         <a:rPr/>
-                        <a:t>▆▇▅▆▃</a:t>
+                        <a:t>▁▅▇▇▂</a:t>
                       </a:r>
                     </a:p>
                   </a:txBody>
@@ -11092,7 +11199,7 @@
                       </a:pPr>
                       <a:r>
                         <a:rPr/>
-                        <a:t>tree_no</a:t>
+                        <a:t>needle_width_mm</a:t>
                       </a:r>
                     </a:p>
                   </a:txBody>
@@ -11137,7 +11244,7 @@
                       </a:pPr>
                       <a:r>
                         <a:rPr/>
-                        <a:t>2.50</a:t>
+                        <a:t>1.07</a:t>
                       </a:r>
                     </a:p>
                   </a:txBody>
@@ -11152,7 +11259,7 @@
                       </a:pPr>
                       <a:r>
                         <a:rPr/>
-                        <a:t>1.13</a:t>
+                        <a:t>0.21</a:t>
                       </a:r>
                     </a:p>
                   </a:txBody>
@@ -11167,7 +11274,7 @@
                       </a:pPr>
                       <a:r>
                         <a:rPr/>
-                        <a:t>1</a:t>
+                        <a:t>0.65</a:t>
                       </a:r>
                     </a:p>
                   </a:txBody>
@@ -11182,7 +11289,7 @@
                       </a:pPr>
                       <a:r>
                         <a:rPr/>
-                        <a:t>1.75</a:t>
+                        <a:t>0.96</a:t>
                       </a:r>
                     </a:p>
                   </a:txBody>
@@ -11197,7 +11304,7 @@
                       </a:pPr>
                       <a:r>
                         <a:rPr/>
-                        <a:t>2.5</a:t>
+                        <a:t>1.10</a:t>
                       </a:r>
                     </a:p>
                   </a:txBody>
@@ -11212,7 +11319,7 @@
                       </a:pPr>
                       <a:r>
                         <a:rPr/>
-                        <a:t>3.25</a:t>
+                        <a:t>1.22</a:t>
                       </a:r>
                     </a:p>
                   </a:txBody>
@@ -11227,7 +11334,7 @@
                       </a:pPr>
                       <a:r>
                         <a:rPr/>
-                        <a:t>4</a:t>
+                        <a:t>1.58</a:t>
                       </a:r>
                     </a:p>
                   </a:txBody>
@@ -11242,7 +11349,7 @@
                       </a:pPr>
                       <a:r>
                         <a:rPr/>
-                        <a:t>▇▇▁▇▇</a:t>
+                        <a:t>▃▅▇▅▁</a:t>
                       </a:r>
                     </a:p>
                   </a:txBody>
@@ -11307,7 +11414,7 @@
               <a:rPr sz="2000">
                 <a:latin typeface="Courier"/>
               </a:rPr>
-              <a:t>length_mm</a:t>
+              <a:t>needle_length_mm</a:t>
             </a:r>
             <a:r>
               <a:rPr sz="2000"/>
@@ -11317,7 +11424,7 @@
               <a:rPr sz="2000">
                 <a:latin typeface="Courier"/>
               </a:rPr>
-              <a:t>n_s</a:t>
+              <a:t>side</a:t>
             </a:r>
           </a:p>
           <a:p>
@@ -11532,7 +11639,7 @@
               <a:rPr sz="2000">
                 <a:latin typeface="Courier"/>
               </a:rPr>
-              <a:t>n_s</a:t>
+              <a:t>side</a:t>
             </a:r>
             <a:r>
               <a:rPr sz="2000"/>
@@ -11625,7 +11732,7 @@
                 </a:solidFill>
                 <a:latin typeface="Courier"/>
               </a:rPr>
-              <a:t>(n_s) </a:t>
+              <a:t>(side) </a:t>
             </a:r>
             <a:r>
               <a:rPr>
@@ -11735,7 +11842,7 @@
                 </a:solidFill>
                 <a:latin typeface="Courier"/>
               </a:rPr>
-              <a:t>(length_mm)),</a:t>
+              <a:t>(needle_length_mm)),</a:t>
             </a:r>
             <a:br/>
             <a:r>
@@ -11799,7 +11906,7 @@
                 </a:solidFill>
                 <a:latin typeface="Courier"/>
               </a:rPr>
-              <a:t>(length_mm, </a:t>
+              <a:t>(needle_length_mm, </a:t>
             </a:r>
             <a:r>
               <a:rPr>
@@ -11917,7 +12024,7 @@
                 </a:solidFill>
                 <a:latin typeface="Courier"/>
               </a:rPr>
-              <a:t>(length_mm, </a:t>
+              <a:t>(needle_length_mm, </a:t>
             </a:r>
             <a:r>
               <a:rPr>
@@ -12035,7 +12142,7 @@
                 </a:solidFill>
                 <a:latin typeface="Courier"/>
               </a:rPr>
-              <a:t>(length_mm, </a:t>
+              <a:t>(needle_length_mm, </a:t>
             </a:r>
             <a:r>
               <a:rPr>
@@ -12135,7 +12242,61 @@
                 </a:solidFill>
                 <a:latin typeface="Courier"/>
               </a:rPr>
-              <a:t>(sd_mm </a:t>
+              <a:t>(</a:t>
+            </a:r>
+            <a:r>
+              <a:rPr>
+                <a:solidFill>
+                  <a:srgbClr val="4758AB"/>
+                </a:solidFill>
+                <a:latin typeface="Courier"/>
+              </a:rPr>
+              <a:t>sd</a:t>
+            </a:r>
+            <a:r>
+              <a:rPr>
+                <a:solidFill>
+                  <a:srgbClr val="003B4F"/>
+                </a:solidFill>
+                <a:latin typeface="Courier"/>
+              </a:rPr>
+              <a:t>(needle_length_mm, </a:t>
+            </a:r>
+            <a:r>
+              <a:rPr>
+                <a:solidFill>
+                  <a:srgbClr val="657422"/>
+                </a:solidFill>
+                <a:latin typeface="Courier"/>
+              </a:rPr>
+              <a:t>na.rm =</a:t>
+            </a:r>
+            <a:r>
+              <a:rPr>
+                <a:solidFill>
+                  <a:srgbClr val="003B4F"/>
+                </a:solidFill>
+                <a:latin typeface="Courier"/>
+              </a:rPr>
+              <a:t> </a:t>
+            </a:r>
+            <a:r>
+              <a:rPr>
+                <a:solidFill>
+                  <a:srgbClr val="8F5902"/>
+                </a:solidFill>
+                <a:latin typeface="Courier"/>
+              </a:rPr>
+              <a:t>TRUE</a:t>
+            </a:r>
+            <a:r>
+              <a:rPr>
+                <a:solidFill>
+                  <a:srgbClr val="003B4F"/>
+                </a:solidFill>
+                <a:latin typeface="Courier"/>
+              </a:rPr>
+              <a:t>) </a:t>
             </a:r>
             <a:r>
               <a:rPr>
@@ -12222,10 +12383,10 @@
                 <a:latin typeface="Courier"/>
               </a:rPr>
               <a:t># A tibble: 2 × 6
-  n_s       n mean_mm med_mm sd_mm se_mm
+  side      n mean_mm med_mm sd_mm se_mm
   &lt;chr&gt; &lt;int&gt;   &lt;dbl&gt;  &lt;dbl&gt; &lt;dbl&gt; &lt;dbl&gt;
-1 n        24    20.4   20.5  2.45  0.5 
-2 s        24    14.9   15    1.91  0.39</a:t>
+1 shady    32    14.1   14.2  2.78  0.49
+2 sunny    32    15.2   15.4  2.59  0.46</a:t>
             </a:r>
           </a:p>
         </p:txBody>
@@ -12250,7 +12411,7 @@
               <a:rPr>
                 <a:latin typeface="Courier"/>
               </a:rPr>
-              <a:t>group_by(n_s)</a:t>
+              <a:t>group_by(side)</a:t>
             </a:r>
             <a:r>
               <a:rPr/>
@@ -12286,30 +12447,58 @@
             </a:r>
           </a:p>
           <a:p>
-            <a:pPr lvl="0"/>
-            <a:r>
-              <a:rPr/>
-              <a:t>A column you just created (</a:t>
-            </a:r>
-            <a:r>
-              <a:rPr>
+            <a:pPr lvl="0" indent="0" marL="1270000">
+              <a:buNone/>
+            </a:pPr>
+            <a:r>
+              <a:rPr sz="2000" b="1"/>
+              <a:t>Warning</a:t>
+            </a:r>
+          </a:p>
+          <a:p>
+            <a:pPr lvl="0" indent="0" marL="1270000">
+              <a:buNone/>
+            </a:pPr>
+            <a:r>
+              <a:rPr sz="2000" b="1"/>
+              <a:t>⚠️ Round last, not first</a:t>
+            </a:r>
+          </a:p>
+          <a:p>
+            <a:pPr lvl="0" indent="0" marL="1270000">
+              <a:buNone/>
+            </a:pPr>
+            <a:r>
+              <a:rPr sz="2000"/>
+              <a:t>Tempting to write </a:t>
+            </a:r>
+            <a:r>
+              <a:rPr sz="2000">
+                <a:latin typeface="Courier"/>
+              </a:rPr>
+              <a:t>se_mm = sd_mm / sqrt(n)</a:t>
+            </a:r>
+            <a:r>
+              <a:rPr sz="2000"/>
+              <a:t> and reuse the column above. Don’t — </a:t>
+            </a:r>
+            <a:r>
+              <a:rPr sz="2000">
                 <a:latin typeface="Courier"/>
               </a:rPr>
               <a:t>sd_mm</a:t>
             </a:r>
             <a:r>
-              <a:rPr/>
-              <a:t>) can feed the next one (</a:t>
-            </a:r>
-            <a:r>
-              <a:rPr>
-                <a:latin typeface="Courier"/>
-              </a:rPr>
-              <a:t>se_mm</a:t>
-            </a:r>
-            <a:r>
-              <a:rPr/>
-              <a:t>)</a:t>
+              <a:rPr sz="2000"/>
+              <a:t> has already been </a:t>
+            </a:r>
+            <a:r>
+              <a:rPr sz="2000" b="1"/>
+              <a:t>rounded</a:t>
+            </a:r>
+            <a:r>
+              <a:rPr sz="2000"/>
+              <a:t>, so the SE inherits that error. Compute from the raw values every time; round only what you print.</a:t>
             </a:r>
           </a:p>
           <a:p>
@@ -12446,7 +12635,7 @@
                 </a:solidFill>
                 <a:latin typeface="Courier"/>
               </a:rPr>
-              <a:t>(group, n_s) </a:t>
+              <a:t>(team, side) </a:t>
             </a:r>
             <a:r>
               <a:rPr>
@@ -12556,7 +12745,7 @@
                 </a:solidFill>
                 <a:latin typeface="Courier"/>
               </a:rPr>
-              <a:t>(length_mm)),</a:t>
+              <a:t>(needle_length_mm)),</a:t>
             </a:r>
             <a:br/>
             <a:r>
@@ -12620,7 +12809,7 @@
                 </a:solidFill>
                 <a:latin typeface="Courier"/>
               </a:rPr>
-              <a:t>(length_mm, </a:t>
+              <a:t>(needle_length_mm, </a:t>
             </a:r>
             <a:r>
               <a:rPr>
@@ -12738,7 +12927,7 @@
                 </a:solidFill>
                 <a:latin typeface="Courier"/>
               </a:rPr>
-              <a:t>(length_mm, </a:t>
+              <a:t>(needle_length_mm, </a:t>
             </a:r>
             <a:r>
               <a:rPr>
@@ -12898,16 +13087,16 @@
                 <a:latin typeface="Courier"/>
               </a:rPr>
               <a:t># A tibble: 8 × 5
-  group       n_s       n mean_mm se_mm
-  &lt;chr&gt;       &lt;chr&gt; &lt;int&gt;   &lt;dbl&gt; &lt;dbl&gt;
-1 cephalopods n         6    21    1.24
-2 cephalopods s         6    15    0.58
-3 crayfish    n         6    21    1.24
-4 crayfish    s         6    15    0.58
-5 salmon      n         6    19.8  0.79
-6 salmon      s         6    12.8  0.4 
-7 snail       n         6    19.8  0.79
-8 snail       s         6    16.8  0.6 </a:t>
+  team       side      n mean_mm se_mm
+  &lt;chr&gt;      &lt;chr&gt; &lt;int&gt;   &lt;dbl&gt; &lt;dbl&gt;
+1 botany     shady     8    16.2  0.94
+2 botany     sunny     8    17.3  0.44
+3 grace_jace shady     8    15.4  0.61
+4 grace_jace sunny     8    15.5  1.07
+5 one        shady     8    13.2  0.78
+6 one        sunny     8    14.2  0.63
+7 waterbugs  shady     8    11.7  0.82
+8 waterbugs  sunny     8    13.8  0.96</a:t>
             </a:r>
           </a:p>
         </p:txBody>
@@ -12932,7 +13121,7 @@
               <a:rPr>
                 <a:latin typeface="Courier"/>
               </a:rPr>
-              <a:t>group_by(group, n_s)</a:t>
+              <a:t>group_by(team, side)</a:t>
             </a:r>
             <a:r>
               <a:rPr/>
@@ -13088,17 +13277,15 @@
             </a:pPr>
             <a:r>
               <a:rPr/>
-              <a:t>Part 7b · Bringing Back </a:t>
-            </a:r>
-            <a:r>
-              <a:rPr>
-                <a:latin typeface="Courier"/>
-              </a:rPr>
-              <a:t>case_when()</a:t>
+              <a:t>Part 7c · The </a:t>
+            </a:r>
+            <a:r>
+              <a:rPr i="1"/>
+              <a:t>n</a:t>
             </a:r>
             <a:r>
               <a:rPr/>
-              <a:t> from Wrangling Your Data</a:t>
+              <a:t> You Report Is a Choice</a:t>
             </a:r>
           </a:p>
         </p:txBody>
@@ -13138,8 +13325,11 @@
         <p:spPr>
           <a:xfrm>
             <a:off x="0" y="0"/>
-            <a:ext cx="9144000" cy="582780"/>
+            <a:ext cx="9144000" cy="602780"/>
           </a:xfrm>
+          <a:solidFill>
+            <a:srgbClr val="70121D"/>
+          </a:solidFill>
         </p:spPr>
         <p:txBody>
           <a:bodyPr/>
@@ -13150,7 +13340,13 @@
             </a:pPr>
             <a:r>
               <a:rPr/>
-              <a:t>Summarizing the Categories You Built Last Class</a:t>
+              <a:t>Look again at that </a:t>
+            </a:r>
+            <a:r>
+              <a:rPr>
+                <a:latin typeface="Courier"/>
+              </a:rPr>
+              <a:t>n</a:t>
             </a:r>
           </a:p>
         </p:txBody>
@@ -13162,7 +13358,7 @@
             <a:spLocks noGrp="1"/>
           </p:cNvSpPr>
           <p:nvPr>
-            <p:ph idx="1"/>
+            <p:ph idx="1" sz="half"/>
           </p:nvPr>
         </p:nvSpPr>
         <p:spPr/>
@@ -13170,6 +13366,159 @@
           <a:bodyPr/>
           <a:lstStyle/>
           <a:p>
+            <a:pPr lvl="0" indent="0" marL="0">
+              <a:buNone/>
+            </a:pPr>
+            <a:r>
+              <a:rPr/>
+              <a:t>Our side summary reported </a:t>
+            </a:r>
+            <a:r>
+              <a:rPr b="1"/>
+              <a:t>n = 32 per side</a:t>
+            </a:r>
+            <a:r>
+              <a:rPr/>
+              <a:t>. But where did 32 come from?</a:t>
+            </a:r>
+          </a:p>
+          <a:p>
+            <a:pPr lvl="0" indent="0">
+              <a:buNone/>
+            </a:pPr>
+            <a:r>
+              <a:rPr>
+                <a:solidFill>
+                  <a:srgbClr val="003B4F"/>
+                </a:solidFill>
+                <a:latin typeface="Courier"/>
+              </a:rPr>
+              <a:t>pine_df </a:t>
+            </a:r>
+            <a:r>
+              <a:rPr>
+                <a:solidFill>
+                  <a:srgbClr val="5E5E5E"/>
+                </a:solidFill>
+                <a:latin typeface="Courier"/>
+              </a:rPr>
+              <a:t>|&gt;</a:t>
+            </a:r>
+            <a:r>
+              <a:rPr>
+                <a:solidFill>
+                  <a:srgbClr val="003B4F"/>
+                </a:solidFill>
+                <a:latin typeface="Courier"/>
+              </a:rPr>
+              <a:t> </a:t>
+            </a:r>
+            <a:r>
+              <a:rPr>
+                <a:solidFill>
+                  <a:srgbClr val="4758AB"/>
+                </a:solidFill>
+                <a:latin typeface="Courier"/>
+              </a:rPr>
+              <a:t>count</a:t>
+            </a:r>
+            <a:r>
+              <a:rPr>
+                <a:solidFill>
+                  <a:srgbClr val="003B4F"/>
+                </a:solidFill>
+                <a:latin typeface="Courier"/>
+              </a:rPr>
+              <a:t>(side, team)</a:t>
+            </a:r>
+          </a:p>
+          <a:p>
+            <a:pPr lvl="0" indent="0">
+              <a:buNone/>
+            </a:pPr>
+            <a:r>
+              <a:rPr>
+                <a:latin typeface="Courier"/>
+              </a:rPr>
+              <a:t># A tibble: 8 × 3
+  side  team           n
+  &lt;chr&gt; &lt;chr&gt;      &lt;int&gt;
+1 shady botany         8
+2 shady grace_jace     8
+3 shady one            8
+4 shady waterbugs      8
+5 sunny botany         8
+6 sunny grace_jace     8
+7 sunny one            8
+8 sunny waterbugs      8</a:t>
+            </a:r>
+          </a:p>
+          <a:p>
+            <a:pPr lvl="0" indent="0" marL="0">
+              <a:buNone/>
+            </a:pPr>
+            <a:r>
+              <a:rPr/>
+              <a:t>32 needles per side — but only </a:t>
+            </a:r>
+            <a:r>
+              <a:rPr b="1"/>
+              <a:t>4 trees</a:t>
+            </a:r>
+            <a:r>
+              <a:rPr/>
+              <a:t>. We measured 8 needles from each tree and then counted them as 8 independent facts about sun exposure.</a:t>
+            </a:r>
+          </a:p>
+          <a:p>
+            <a:pPr lvl="0" indent="0" marL="1270000">
+              <a:buNone/>
+            </a:pPr>
+            <a:r>
+              <a:rPr sz="2000" b="1"/>
+              <a:t>Important</a:t>
+            </a:r>
+          </a:p>
+          <a:p>
+            <a:pPr lvl="0" indent="0" marL="1270000">
+              <a:buNone/>
+            </a:pPr>
+            <a:r>
+              <a:rPr sz="2000" b="1"/>
+              <a:t>This is the pseudoreplication from Getting Started, in a summary table.</a:t>
+            </a:r>
+            <a:r>
+              <a:rPr sz="2000"/>
+              <a:t> The </a:t>
+            </a:r>
+            <a:r>
+              <a:rPr sz="2000">
+                <a:latin typeface="Courier"/>
+              </a:rPr>
+              <a:t>n</a:t>
+            </a:r>
+            <a:r>
+              <a:rPr sz="2000"/>
+              <a:t> in your table is a claim about how much independent evidence you have. Right now that claim is wrong.</a:t>
+            </a:r>
+          </a:p>
+        </p:txBody>
+      </p:sp>
+      <p:sp>
+        <p:nvSpPr>
+          <p:cNvPr id="4" name="Content Placeholder 3"/>
+          <p:cNvSpPr>
+            <a:spLocks noGrp="1"/>
+          </p:cNvSpPr>
+          <p:nvPr>
+            <p:ph idx="2" sz="half"/>
+          </p:nvPr>
+        </p:nvSpPr>
+        <p:spPr/>
+        <p:txBody>
+          <a:bodyPr/>
+          <a:lstStyle/>
+          <a:p>
             <a:pPr lvl="0" indent="0" marL="1270000">
               <a:buNone/>
             </a:pPr>
@@ -13184,61 +13533,48 @@
             </a:pPr>
             <a:r>
               <a:rPr sz="2000" b="1"/>
-              <a:t>🔮 Predict first:</a:t>
-            </a:r>
+              <a:t>✅ Key idea</a:t>
+            </a:r>
+          </a:p>
+          <a:p>
+            <a:pPr lvl="0" indent="0" marL="1270000">
+              <a:buNone/>
+            </a:pPr>
             <a:r>
               <a:rPr sz="2000"/>
-              <a:t> We’re grouping by the </a:t>
+              <a:t>Ask of every </a:t>
             </a:r>
             <a:r>
               <a:rPr sz="2000">
                 <a:latin typeface="Courier"/>
               </a:rPr>
-              <a:t>size_class</a:t>
+              <a:t>n</a:t>
             </a:r>
             <a:r>
               <a:rPr sz="2000"/>
-              <a:t> bins (</a:t>
-            </a:r>
-            <a:r>
-              <a:rPr sz="2000">
-                <a:latin typeface="Courier"/>
-              </a:rPr>
-              <a:t>"short"</a:t>
-            </a:r>
+              <a:t>: </a:t>
+            </a:r>
+            <a:r>
+              <a:rPr sz="2000" b="1"/>
+              <a:t>“n of what?”</a:t>
+            </a:r>
+            <a:br/>
             <a:r>
               <a:rPr sz="2000"/>
-              <a:t>/</a:t>
-            </a:r>
-            <a:r>
-              <a:rPr sz="2000">
-                <a:latin typeface="Courier"/>
-              </a:rPr>
-              <a:t>"medium"</a:t>
-            </a:r>
+              <a:t>n = 32 needles is true.</a:t>
+            </a:r>
+            <a:br/>
             <a:r>
               <a:rPr sz="2000"/>
-              <a:t>/</a:t>
-            </a:r>
-            <a:r>
-              <a:rPr sz="2000">
-                <a:latin typeface="Courier"/>
-              </a:rPr>
-              <a:t>"long"</a:t>
+              <a:t>n = 32 </a:t>
+            </a:r>
+            <a:r>
+              <a:rPr sz="2000" i="1"/>
+              <a:t>independent measurements of sun exposure</a:t>
             </a:r>
             <a:r>
               <a:rPr sz="2000"/>
-              <a:t>) from Wrangling Your Data’s </a:t>
-            </a:r>
-            <a:r>
-              <a:rPr sz="2000">
-                <a:latin typeface="Courier"/>
-              </a:rPr>
-              <a:t>case_when()</a:t>
-            </a:r>
-            <a:r>
-              <a:rPr sz="2000"/>
-              <a:t>. How many rows will the summary have?</a:t>
+              <a:t> is not.</a:t>
             </a:r>
           </a:p>
         </p:txBody>
@@ -13267,6 +13603,39 @@
       </p:grpSpPr>
       <p:sp>
         <p:nvSpPr>
+          <p:cNvPr id="2" name="Title 1"/>
+          <p:cNvSpPr>
+            <a:spLocks noGrp="1"/>
+          </p:cNvSpPr>
+          <p:nvPr>
+            <p:ph type="title"/>
+          </p:nvPr>
+        </p:nvSpPr>
+        <p:spPr>
+          <a:xfrm>
+            <a:off x="0" y="0"/>
+            <a:ext cx="9144000" cy="602780"/>
+          </a:xfrm>
+          <a:solidFill>
+            <a:srgbClr val="70121D"/>
+          </a:solidFill>
+        </p:spPr>
+        <p:txBody>
+          <a:bodyPr/>
+          <a:lstStyle/>
+          <a:p>
+            <a:pPr lvl="0" indent="0" marL="0">
+              <a:buNone/>
+            </a:pPr>
+            <a:r>
+              <a:rPr/>
+              <a:t>The two-stage summary — the right way</a:t>
+            </a:r>
+          </a:p>
+        </p:txBody>
+      </p:sp>
+      <p:sp>
+        <p:nvSpPr>
           <p:cNvPr id="3" name="Content Placeholder 2"/>
           <p:cNvSpPr>
             <a:spLocks noGrp="1"/>
@@ -13280,6 +13649,19 @@
           <a:bodyPr/>
           <a:lstStyle/>
           <a:p>
+            <a:pPr lvl="0" indent="0" marL="0">
+              <a:buNone/>
+            </a:pPr>
+            <a:r>
+              <a:rPr b="1"/>
+              <a:t>Stage 1</a:t>
+            </a:r>
+            <a:r>
+              <a:rPr/>
+              <a:t> — collapse each tree to one number:</a:t>
+            </a:r>
+          </a:p>
+          <a:p>
             <a:pPr lvl="0" indent="0">
               <a:buNone/>
             </a:pPr>
@@ -13290,7 +13672,7 @@
                 </a:solidFill>
                 <a:latin typeface="Courier"/>
               </a:rPr>
-              <a:t>size_class_stats_df &lt;- pine_df </a:t>
+              <a:t>team_means_df &lt;- pine_df </a:t>
             </a:r>
             <a:r>
               <a:rPr>
@@ -13318,7 +13700,44 @@
                 </a:solidFill>
                 <a:latin typeface="Courier"/>
               </a:rPr>
-              <a:t>mutate</a:t>
+              <a:t>group_by</a:t>
+            </a:r>
+            <a:r>
+              <a:rPr>
+                <a:solidFill>
+                  <a:srgbClr val="003B4F"/>
+                </a:solidFill>
+                <a:latin typeface="Courier"/>
+              </a:rPr>
+              <a:t>(team, side) </a:t>
+            </a:r>
+            <a:r>
+              <a:rPr>
+                <a:solidFill>
+                  <a:srgbClr val="5E5E5E"/>
+                </a:solidFill>
+                <a:latin typeface="Courier"/>
+              </a:rPr>
+              <a:t>|&gt;</a:t>
+            </a:r>
+            <a:br/>
+            <a:r>
+              <a:rPr>
+                <a:solidFill>
+                  <a:srgbClr val="003B4F"/>
+                </a:solidFill>
+                <a:latin typeface="Courier"/>
+              </a:rPr>
+              <a:t>  </a:t>
+            </a:r>
+            <a:r>
+              <a:rPr>
+                <a:solidFill>
+                  <a:srgbClr val="4758AB"/>
+                </a:solidFill>
+                <a:latin typeface="Courier"/>
+              </a:rPr>
+              <a:t>summarize</a:t>
             </a:r>
             <a:r>
               <a:rPr>
@@ -13329,6 +13748,78 @@
               </a:rPr>
               <a:t>(</a:t>
             </a:r>
+            <a:r>
+              <a:rPr>
+                <a:solidFill>
+                  <a:srgbClr val="657422"/>
+                </a:solidFill>
+                <a:latin typeface="Courier"/>
+              </a:rPr>
+              <a:t>team_mean_mm =</a:t>
+            </a:r>
+            <a:r>
+              <a:rPr>
+                <a:solidFill>
+                  <a:srgbClr val="003B4F"/>
+                </a:solidFill>
+                <a:latin typeface="Courier"/>
+              </a:rPr>
+              <a:t> </a:t>
+            </a:r>
+            <a:r>
+              <a:rPr>
+                <a:solidFill>
+                  <a:srgbClr val="4758AB"/>
+                </a:solidFill>
+                <a:latin typeface="Courier"/>
+              </a:rPr>
+              <a:t>mean</a:t>
+            </a:r>
+            <a:r>
+              <a:rPr>
+                <a:solidFill>
+                  <a:srgbClr val="003B4F"/>
+                </a:solidFill>
+                <a:latin typeface="Courier"/>
+              </a:rPr>
+              <a:t>(needle_length_mm, </a:t>
+            </a:r>
+            <a:r>
+              <a:rPr>
+                <a:solidFill>
+                  <a:srgbClr val="657422"/>
+                </a:solidFill>
+                <a:latin typeface="Courier"/>
+              </a:rPr>
+              <a:t>na.rm =</a:t>
+            </a:r>
+            <a:r>
+              <a:rPr>
+                <a:solidFill>
+                  <a:srgbClr val="003B4F"/>
+                </a:solidFill>
+                <a:latin typeface="Courier"/>
+              </a:rPr>
+              <a:t> </a:t>
+            </a:r>
+            <a:r>
+              <a:rPr>
+                <a:solidFill>
+                  <a:srgbClr val="8F5902"/>
+                </a:solidFill>
+                <a:latin typeface="Courier"/>
+              </a:rPr>
+              <a:t>TRUE</a:t>
+            </a:r>
+            <a:r>
+              <a:rPr>
+                <a:solidFill>
+                  <a:srgbClr val="003B4F"/>
+                </a:solidFill>
+                <a:latin typeface="Courier"/>
+              </a:rPr>
+              <a:t>),</a:t>
+            </a:r>
             <a:br/>
             <a:r>
               <a:rPr>
@@ -13337,6 +13828,161 @@
                 </a:solidFill>
                 <a:latin typeface="Courier"/>
               </a:rPr>
+              <a:t>            </a:t>
+            </a:r>
+            <a:r>
+              <a:rPr>
+                <a:solidFill>
+                  <a:srgbClr val="657422"/>
+                </a:solidFill>
+                <a:latin typeface="Courier"/>
+              </a:rPr>
+              <a:t>.groups =</a:t>
+            </a:r>
+            <a:r>
+              <a:rPr>
+                <a:solidFill>
+                  <a:srgbClr val="003B4F"/>
+                </a:solidFill>
+                <a:latin typeface="Courier"/>
+              </a:rPr>
+              <a:t> </a:t>
+            </a:r>
+            <a:r>
+              <a:rPr>
+                <a:solidFill>
+                  <a:srgbClr val="20794D"/>
+                </a:solidFill>
+                <a:latin typeface="Courier"/>
+              </a:rPr>
+              <a:t>"drop"</a:t>
+            </a:r>
+            <a:r>
+              <a:rPr>
+                <a:solidFill>
+                  <a:srgbClr val="003B4F"/>
+                </a:solidFill>
+                <a:latin typeface="Courier"/>
+              </a:rPr>
+              <a:t>)</a:t>
+            </a:r>
+          </a:p>
+          <a:p>
+            <a:pPr lvl="0" indent="0" marL="0">
+              <a:buNone/>
+            </a:pPr>
+            <a:r>
+              <a:rPr b="1"/>
+              <a:t>Stage 2</a:t>
+            </a:r>
+            <a:r>
+              <a:rPr/>
+              <a:t> — now summarize </a:t>
+            </a:r>
+            <a:r>
+              <a:rPr i="1"/>
+              <a:t>those</a:t>
+            </a:r>
+            <a:r>
+              <a:rPr/>
+              <a:t>:</a:t>
+            </a:r>
+          </a:p>
+          <a:p>
+            <a:pPr lvl="0" indent="0">
+              <a:buNone/>
+            </a:pPr>
+            <a:r>
+              <a:rPr>
+                <a:solidFill>
+                  <a:srgbClr val="003B4F"/>
+                </a:solidFill>
+                <a:latin typeface="Courier"/>
+              </a:rPr>
+              <a:t>side_correct_df &lt;- team_means_df </a:t>
+            </a:r>
+            <a:r>
+              <a:rPr>
+                <a:solidFill>
+                  <a:srgbClr val="5E5E5E"/>
+                </a:solidFill>
+                <a:latin typeface="Courier"/>
+              </a:rPr>
+              <a:t>|&gt;</a:t>
+            </a:r>
+            <a:br/>
+            <a:r>
+              <a:rPr>
+                <a:solidFill>
+                  <a:srgbClr val="003B4F"/>
+                </a:solidFill>
+                <a:latin typeface="Courier"/>
+              </a:rPr>
+              <a:t>  </a:t>
+            </a:r>
+            <a:r>
+              <a:rPr>
+                <a:solidFill>
+                  <a:srgbClr val="4758AB"/>
+                </a:solidFill>
+                <a:latin typeface="Courier"/>
+              </a:rPr>
+              <a:t>group_by</a:t>
+            </a:r>
+            <a:r>
+              <a:rPr>
+                <a:solidFill>
+                  <a:srgbClr val="003B4F"/>
+                </a:solidFill>
+                <a:latin typeface="Courier"/>
+              </a:rPr>
+              <a:t>(side) </a:t>
+            </a:r>
+            <a:r>
+              <a:rPr>
+                <a:solidFill>
+                  <a:srgbClr val="5E5E5E"/>
+                </a:solidFill>
+                <a:latin typeface="Courier"/>
+              </a:rPr>
+              <a:t>|&gt;</a:t>
+            </a:r>
+            <a:br/>
+            <a:r>
+              <a:rPr>
+                <a:solidFill>
+                  <a:srgbClr val="003B4F"/>
+                </a:solidFill>
+                <a:latin typeface="Courier"/>
+              </a:rPr>
+              <a:t>  </a:t>
+            </a:r>
+            <a:r>
+              <a:rPr>
+                <a:solidFill>
+                  <a:srgbClr val="4758AB"/>
+                </a:solidFill>
+                <a:latin typeface="Courier"/>
+              </a:rPr>
+              <a:t>summarize</a:t>
+            </a:r>
+            <a:r>
+              <a:rPr>
+                <a:solidFill>
+                  <a:srgbClr val="003B4F"/>
+                </a:solidFill>
+                <a:latin typeface="Courier"/>
+              </a:rPr>
+              <a:t>(</a:t>
+            </a:r>
+            <a:br/>
+            <a:r>
+              <a:rPr>
+                <a:solidFill>
+                  <a:srgbClr val="003B4F"/>
+                </a:solidFill>
+                <a:latin typeface="Courier"/>
+              </a:rPr>
               <a:t>    </a:t>
             </a:r>
             <a:r>
@@ -13346,7 +13992,7 @@
                 </a:solidFill>
                 <a:latin typeface="Courier"/>
               </a:rPr>
-              <a:t>size_class =</a:t>
+              <a:t>n_trees =</a:t>
             </a:r>
             <a:r>
               <a:rPr>
@@ -13364,7 +14010,7 @@
                 </a:solidFill>
                 <a:latin typeface="Courier"/>
               </a:rPr>
-              <a:t>case_when</a:t>
+              <a:t>sum</a:t>
             </a:r>
             <a:r>
               <a:rPr>
@@ -13375,6 +14021,33 @@
               </a:rPr>
               <a:t>(</a:t>
             </a:r>
+            <a:r>
+              <a:rPr>
+                <a:solidFill>
+                  <a:srgbClr val="5E5E5E"/>
+                </a:solidFill>
+                <a:latin typeface="Courier"/>
+              </a:rPr>
+              <a:t>!</a:t>
+            </a:r>
+            <a:r>
+              <a:rPr>
+                <a:solidFill>
+                  <a:srgbClr val="4758AB"/>
+                </a:solidFill>
+                <a:latin typeface="Courier"/>
+              </a:rPr>
+              <a:t>is.na</a:t>
+            </a:r>
+            <a:r>
+              <a:rPr>
+                <a:solidFill>
+                  <a:srgbClr val="003B4F"/>
+                </a:solidFill>
+                <a:latin typeface="Courier"/>
+              </a:rPr>
+              <a:t>(team_mean_mm)),</a:t>
+            </a:r>
             <a:br/>
             <a:r>
               <a:rPr>
@@ -13383,7 +14056,143 @@
                 </a:solidFill>
                 <a:latin typeface="Courier"/>
               </a:rPr>
-              <a:t>      length_mm </a:t>
+              <a:t>    </a:t>
+            </a:r>
+            <a:r>
+              <a:rPr>
+                <a:solidFill>
+                  <a:srgbClr val="657422"/>
+                </a:solidFill>
+                <a:latin typeface="Courier"/>
+              </a:rPr>
+              <a:t>mean_mm =</a:t>
+            </a:r>
+            <a:r>
+              <a:rPr>
+                <a:solidFill>
+                  <a:srgbClr val="003B4F"/>
+                </a:solidFill>
+                <a:latin typeface="Courier"/>
+              </a:rPr>
+              <a:t> </a:t>
+            </a:r>
+            <a:r>
+              <a:rPr>
+                <a:solidFill>
+                  <a:srgbClr val="4758AB"/>
+                </a:solidFill>
+                <a:latin typeface="Courier"/>
+              </a:rPr>
+              <a:t>round</a:t>
+            </a:r>
+            <a:r>
+              <a:rPr>
+                <a:solidFill>
+                  <a:srgbClr val="003B4F"/>
+                </a:solidFill>
+                <a:latin typeface="Courier"/>
+              </a:rPr>
+              <a:t>(</a:t>
+            </a:r>
+            <a:r>
+              <a:rPr>
+                <a:solidFill>
+                  <a:srgbClr val="4758AB"/>
+                </a:solidFill>
+                <a:latin typeface="Courier"/>
+              </a:rPr>
+              <a:t>mean</a:t>
+            </a:r>
+            <a:r>
+              <a:rPr>
+                <a:solidFill>
+                  <a:srgbClr val="003B4F"/>
+                </a:solidFill>
+                <a:latin typeface="Courier"/>
+              </a:rPr>
+              <a:t>(team_mean_mm), </a:t>
+            </a:r>
+            <a:r>
+              <a:rPr>
+                <a:solidFill>
+                  <a:srgbClr val="AD0000"/>
+                </a:solidFill>
+                <a:latin typeface="Courier"/>
+              </a:rPr>
+              <a:t>2</a:t>
+            </a:r>
+            <a:r>
+              <a:rPr>
+                <a:solidFill>
+                  <a:srgbClr val="003B4F"/>
+                </a:solidFill>
+                <a:latin typeface="Courier"/>
+              </a:rPr>
+              <a:t>),</a:t>
+            </a:r>
+            <a:br/>
+            <a:r>
+              <a:rPr>
+                <a:solidFill>
+                  <a:srgbClr val="003B4F"/>
+                </a:solidFill>
+                <a:latin typeface="Courier"/>
+              </a:rPr>
+              <a:t>    </a:t>
+            </a:r>
+            <a:r>
+              <a:rPr>
+                <a:solidFill>
+                  <a:srgbClr val="657422"/>
+                </a:solidFill>
+                <a:latin typeface="Courier"/>
+              </a:rPr>
+              <a:t>se_mm   =</a:t>
+            </a:r>
+            <a:r>
+              <a:rPr>
+                <a:solidFill>
+                  <a:srgbClr val="003B4F"/>
+                </a:solidFill>
+                <a:latin typeface="Courier"/>
+              </a:rPr>
+              <a:t> </a:t>
+            </a:r>
+            <a:r>
+              <a:rPr>
+                <a:solidFill>
+                  <a:srgbClr val="4758AB"/>
+                </a:solidFill>
+                <a:latin typeface="Courier"/>
+              </a:rPr>
+              <a:t>round</a:t>
+            </a:r>
+            <a:r>
+              <a:rPr>
+                <a:solidFill>
+                  <a:srgbClr val="003B4F"/>
+                </a:solidFill>
+                <a:latin typeface="Courier"/>
+              </a:rPr>
+              <a:t>(</a:t>
+            </a:r>
+            <a:r>
+              <a:rPr>
+                <a:solidFill>
+                  <a:srgbClr val="4758AB"/>
+                </a:solidFill>
+                <a:latin typeface="Courier"/>
+              </a:rPr>
+              <a:t>sd</a:t>
+            </a:r>
+            <a:r>
+              <a:rPr>
+                <a:solidFill>
+                  <a:srgbClr val="003B4F"/>
+                </a:solidFill>
+                <a:latin typeface="Courier"/>
+              </a:rPr>
+              <a:t>(team_mean_mm) </a:t>
             </a:r>
             <a:r>
               <a:rPr>
@@ -13392,7 +14201,7 @@
                 </a:solidFill>
                 <a:latin typeface="Courier"/>
               </a:rPr>
-              <a:t>&lt;</a:t>
+              <a:t>/</a:t>
             </a:r>
             <a:r>
               <a:rPr>
@@ -13406,604 +14215,10 @@
             <a:r>
               <a:rPr>
                 <a:solidFill>
-                  <a:srgbClr val="AD0000"/>
-                </a:solidFill>
-                <a:latin typeface="Courier"/>
-              </a:rPr>
-              <a:t>16</a:t>
-            </a:r>
-            <a:r>
-              <a:rPr>
-                <a:solidFill>
-                  <a:srgbClr val="003B4F"/>
-                </a:solidFill>
-                <a:latin typeface="Courier"/>
-              </a:rPr>
-              <a:t> </a:t>
-            </a:r>
-            <a:r>
-              <a:rPr>
-                <a:solidFill>
-                  <a:srgbClr val="5E5E5E"/>
-                </a:solidFill>
-                <a:latin typeface="Courier"/>
-              </a:rPr>
-              <a:t>~</a:t>
-            </a:r>
-            <a:r>
-              <a:rPr>
-                <a:solidFill>
-                  <a:srgbClr val="003B4F"/>
-                </a:solidFill>
-                <a:latin typeface="Courier"/>
-              </a:rPr>
-              <a:t> </a:t>
-            </a:r>
-            <a:r>
-              <a:rPr>
-                <a:solidFill>
-                  <a:srgbClr val="20794D"/>
-                </a:solidFill>
-                <a:latin typeface="Courier"/>
-              </a:rPr>
-              <a:t>"short"</a:t>
-            </a:r>
-            <a:r>
-              <a:rPr>
-                <a:solidFill>
-                  <a:srgbClr val="003B4F"/>
-                </a:solidFill>
-                <a:latin typeface="Courier"/>
-              </a:rPr>
-              <a:t>,</a:t>
-            </a:r>
-            <a:br/>
-            <a:r>
-              <a:rPr>
-                <a:solidFill>
-                  <a:srgbClr val="003B4F"/>
-                </a:solidFill>
-                <a:latin typeface="Courier"/>
-              </a:rPr>
-              <a:t>      length_mm </a:t>
-            </a:r>
-            <a:r>
-              <a:rPr>
-                <a:solidFill>
-                  <a:srgbClr val="5E5E5E"/>
-                </a:solidFill>
-                <a:latin typeface="Courier"/>
-              </a:rPr>
-              <a:t>&lt;</a:t>
-            </a:r>
-            <a:r>
-              <a:rPr>
-                <a:solidFill>
-                  <a:srgbClr val="003B4F"/>
-                </a:solidFill>
-                <a:latin typeface="Courier"/>
-              </a:rPr>
-              <a:t> </a:t>
-            </a:r>
-            <a:r>
-              <a:rPr>
-                <a:solidFill>
-                  <a:srgbClr val="AD0000"/>
-                </a:solidFill>
-                <a:latin typeface="Courier"/>
-              </a:rPr>
-              <a:t>20</a:t>
-            </a:r>
-            <a:r>
-              <a:rPr>
-                <a:solidFill>
-                  <a:srgbClr val="003B4F"/>
-                </a:solidFill>
-                <a:latin typeface="Courier"/>
-              </a:rPr>
-              <a:t> </a:t>
-            </a:r>
-            <a:r>
-              <a:rPr>
-                <a:solidFill>
-                  <a:srgbClr val="5E5E5E"/>
-                </a:solidFill>
-                <a:latin typeface="Courier"/>
-              </a:rPr>
-              <a:t>~</a:t>
-            </a:r>
-            <a:r>
-              <a:rPr>
-                <a:solidFill>
-                  <a:srgbClr val="003B4F"/>
-                </a:solidFill>
-                <a:latin typeface="Courier"/>
-              </a:rPr>
-              <a:t> </a:t>
-            </a:r>
-            <a:r>
-              <a:rPr>
-                <a:solidFill>
-                  <a:srgbClr val="20794D"/>
-                </a:solidFill>
-                <a:latin typeface="Courier"/>
-              </a:rPr>
-              <a:t>"medium"</a:t>
-            </a:r>
-            <a:r>
-              <a:rPr>
-                <a:solidFill>
-                  <a:srgbClr val="003B4F"/>
-                </a:solidFill>
-                <a:latin typeface="Courier"/>
-              </a:rPr>
-              <a:t>,</a:t>
-            </a:r>
-            <a:br/>
-            <a:r>
-              <a:rPr>
-                <a:solidFill>
-                  <a:srgbClr val="003B4F"/>
-                </a:solidFill>
-                <a:latin typeface="Courier"/>
-              </a:rPr>
-              <a:t>      </a:t>
-            </a:r>
-            <a:r>
-              <a:rPr>
-                <a:solidFill>
-                  <a:srgbClr val="8F5902"/>
-                </a:solidFill>
-                <a:latin typeface="Courier"/>
-              </a:rPr>
-              <a:t>TRUE</a:t>
-            </a:r>
-            <a:r>
-              <a:rPr>
-                <a:solidFill>
-                  <a:srgbClr val="003B4F"/>
-                </a:solidFill>
-                <a:latin typeface="Courier"/>
-              </a:rPr>
-              <a:t>           </a:t>
-            </a:r>
-            <a:r>
-              <a:rPr>
-                <a:solidFill>
-                  <a:srgbClr val="5E5E5E"/>
-                </a:solidFill>
-                <a:latin typeface="Courier"/>
-              </a:rPr>
-              <a:t>~</a:t>
-            </a:r>
-            <a:r>
-              <a:rPr>
-                <a:solidFill>
-                  <a:srgbClr val="003B4F"/>
-                </a:solidFill>
-                <a:latin typeface="Courier"/>
-              </a:rPr>
-              <a:t> </a:t>
-            </a:r>
-            <a:r>
-              <a:rPr>
-                <a:solidFill>
-                  <a:srgbClr val="20794D"/>
-                </a:solidFill>
-                <a:latin typeface="Courier"/>
-              </a:rPr>
-              <a:t>"long"</a:t>
-            </a:r>
-            <a:br/>
-            <a:r>
-              <a:rPr>
-                <a:solidFill>
-                  <a:srgbClr val="003B4F"/>
-                </a:solidFill>
-                <a:latin typeface="Courier"/>
-              </a:rPr>
-              <a:t>    )</a:t>
-            </a:r>
-            <a:br/>
-            <a:r>
-              <a:rPr>
-                <a:solidFill>
-                  <a:srgbClr val="003B4F"/>
-                </a:solidFill>
-                <a:latin typeface="Courier"/>
-              </a:rPr>
-              <a:t>  ) </a:t>
-            </a:r>
-            <a:r>
-              <a:rPr>
-                <a:solidFill>
-                  <a:srgbClr val="5E5E5E"/>
-                </a:solidFill>
-                <a:latin typeface="Courier"/>
-              </a:rPr>
-              <a:t>|&gt;</a:t>
-            </a:r>
-            <a:br/>
-            <a:r>
-              <a:rPr>
-                <a:solidFill>
-                  <a:srgbClr val="003B4F"/>
-                </a:solidFill>
-                <a:latin typeface="Courier"/>
-              </a:rPr>
-              <a:t>  </a:t>
-            </a:r>
-            <a:r>
-              <a:rPr>
-                <a:solidFill>
                   <a:srgbClr val="4758AB"/>
                 </a:solidFill>
                 <a:latin typeface="Courier"/>
               </a:rPr>
-              <a:t>group_by</a:t>
-            </a:r>
-            <a:r>
-              <a:rPr>
-                <a:solidFill>
-                  <a:srgbClr val="003B4F"/>
-                </a:solidFill>
-                <a:latin typeface="Courier"/>
-              </a:rPr>
-              <a:t>(size_class) </a:t>
-            </a:r>
-            <a:r>
-              <a:rPr>
-                <a:solidFill>
-                  <a:srgbClr val="5E5E5E"/>
-                </a:solidFill>
-                <a:latin typeface="Courier"/>
-              </a:rPr>
-              <a:t>|&gt;</a:t>
-            </a:r>
-            <a:br/>
-            <a:r>
-              <a:rPr>
-                <a:solidFill>
-                  <a:srgbClr val="003B4F"/>
-                </a:solidFill>
-                <a:latin typeface="Courier"/>
-              </a:rPr>
-              <a:t>  </a:t>
-            </a:r>
-            <a:r>
-              <a:rPr>
-                <a:solidFill>
-                  <a:srgbClr val="4758AB"/>
-                </a:solidFill>
-                <a:latin typeface="Courier"/>
-              </a:rPr>
-              <a:t>summarize</a:t>
-            </a:r>
-            <a:r>
-              <a:rPr>
-                <a:solidFill>
-                  <a:srgbClr val="003B4F"/>
-                </a:solidFill>
-                <a:latin typeface="Courier"/>
-              </a:rPr>
-              <a:t>(</a:t>
-            </a:r>
-            <a:br/>
-            <a:r>
-              <a:rPr>
-                <a:solidFill>
-                  <a:srgbClr val="003B4F"/>
-                </a:solidFill>
-                <a:latin typeface="Courier"/>
-              </a:rPr>
-              <a:t>    </a:t>
-            </a:r>
-            <a:r>
-              <a:rPr>
-                <a:solidFill>
-                  <a:srgbClr val="657422"/>
-                </a:solidFill>
-                <a:latin typeface="Courier"/>
-              </a:rPr>
-              <a:t>n       =</a:t>
-            </a:r>
-            <a:r>
-              <a:rPr>
-                <a:solidFill>
-                  <a:srgbClr val="003B4F"/>
-                </a:solidFill>
-                <a:latin typeface="Courier"/>
-              </a:rPr>
-              <a:t> </a:t>
-            </a:r>
-            <a:r>
-              <a:rPr>
-                <a:solidFill>
-                  <a:srgbClr val="4758AB"/>
-                </a:solidFill>
-                <a:latin typeface="Courier"/>
-              </a:rPr>
-              <a:t>sum</a:t>
-            </a:r>
-            <a:r>
-              <a:rPr>
-                <a:solidFill>
-                  <a:srgbClr val="003B4F"/>
-                </a:solidFill>
-                <a:latin typeface="Courier"/>
-              </a:rPr>
-              <a:t>(</a:t>
-            </a:r>
-            <a:r>
-              <a:rPr>
-                <a:solidFill>
-                  <a:srgbClr val="5E5E5E"/>
-                </a:solidFill>
-                <a:latin typeface="Courier"/>
-              </a:rPr>
-              <a:t>!</a:t>
-            </a:r>
-            <a:r>
-              <a:rPr>
-                <a:solidFill>
-                  <a:srgbClr val="4758AB"/>
-                </a:solidFill>
-                <a:latin typeface="Courier"/>
-              </a:rPr>
-              <a:t>is.na</a:t>
-            </a:r>
-            <a:r>
-              <a:rPr>
-                <a:solidFill>
-                  <a:srgbClr val="003B4F"/>
-                </a:solidFill>
-                <a:latin typeface="Courier"/>
-              </a:rPr>
-              <a:t>(length_mm)),</a:t>
-            </a:r>
-            <a:br/>
-            <a:r>
-              <a:rPr>
-                <a:solidFill>
-                  <a:srgbClr val="003B4F"/>
-                </a:solidFill>
-                <a:latin typeface="Courier"/>
-              </a:rPr>
-              <a:t>    </a:t>
-            </a:r>
-            <a:r>
-              <a:rPr>
-                <a:solidFill>
-                  <a:srgbClr val="657422"/>
-                </a:solidFill>
-                <a:latin typeface="Courier"/>
-              </a:rPr>
-              <a:t>mean_mm =</a:t>
-            </a:r>
-            <a:r>
-              <a:rPr>
-                <a:solidFill>
-                  <a:srgbClr val="003B4F"/>
-                </a:solidFill>
-                <a:latin typeface="Courier"/>
-              </a:rPr>
-              <a:t> </a:t>
-            </a:r>
-            <a:r>
-              <a:rPr>
-                <a:solidFill>
-                  <a:srgbClr val="4758AB"/>
-                </a:solidFill>
-                <a:latin typeface="Courier"/>
-              </a:rPr>
-              <a:t>round</a:t>
-            </a:r>
-            <a:r>
-              <a:rPr>
-                <a:solidFill>
-                  <a:srgbClr val="003B4F"/>
-                </a:solidFill>
-                <a:latin typeface="Courier"/>
-              </a:rPr>
-              <a:t>(</a:t>
-            </a:r>
-            <a:r>
-              <a:rPr>
-                <a:solidFill>
-                  <a:srgbClr val="4758AB"/>
-                </a:solidFill>
-                <a:latin typeface="Courier"/>
-              </a:rPr>
-              <a:t>mean</a:t>
-            </a:r>
-            <a:r>
-              <a:rPr>
-                <a:solidFill>
-                  <a:srgbClr val="003B4F"/>
-                </a:solidFill>
-                <a:latin typeface="Courier"/>
-              </a:rPr>
-              <a:t>(length_mm, </a:t>
-            </a:r>
-            <a:r>
-              <a:rPr>
-                <a:solidFill>
-                  <a:srgbClr val="657422"/>
-                </a:solidFill>
-                <a:latin typeface="Courier"/>
-              </a:rPr>
-              <a:t>na.rm =</a:t>
-            </a:r>
-            <a:r>
-              <a:rPr>
-                <a:solidFill>
-                  <a:srgbClr val="003B4F"/>
-                </a:solidFill>
-                <a:latin typeface="Courier"/>
-              </a:rPr>
-              <a:t> </a:t>
-            </a:r>
-            <a:r>
-              <a:rPr>
-                <a:solidFill>
-                  <a:srgbClr val="8F5902"/>
-                </a:solidFill>
-                <a:latin typeface="Courier"/>
-              </a:rPr>
-              <a:t>TRUE</a:t>
-            </a:r>
-            <a:r>
-              <a:rPr>
-                <a:solidFill>
-                  <a:srgbClr val="003B4F"/>
-                </a:solidFill>
-                <a:latin typeface="Courier"/>
-              </a:rPr>
-              <a:t>), </a:t>
-            </a:r>
-            <a:r>
-              <a:rPr>
-                <a:solidFill>
-                  <a:srgbClr val="AD0000"/>
-                </a:solidFill>
-                <a:latin typeface="Courier"/>
-              </a:rPr>
-              <a:t>2</a:t>
-            </a:r>
-            <a:r>
-              <a:rPr>
-                <a:solidFill>
-                  <a:srgbClr val="003B4F"/>
-                </a:solidFill>
-                <a:latin typeface="Courier"/>
-              </a:rPr>
-              <a:t>),</a:t>
-            </a:r>
-            <a:br/>
-            <a:r>
-              <a:rPr>
-                <a:solidFill>
-                  <a:srgbClr val="003B4F"/>
-                </a:solidFill>
-                <a:latin typeface="Courier"/>
-              </a:rPr>
-              <a:t>    </a:t>
-            </a:r>
-            <a:r>
-              <a:rPr>
-                <a:solidFill>
-                  <a:srgbClr val="657422"/>
-                </a:solidFill>
-                <a:latin typeface="Courier"/>
-              </a:rPr>
-              <a:t>se_mm   =</a:t>
-            </a:r>
-            <a:r>
-              <a:rPr>
-                <a:solidFill>
-                  <a:srgbClr val="003B4F"/>
-                </a:solidFill>
-                <a:latin typeface="Courier"/>
-              </a:rPr>
-              <a:t> </a:t>
-            </a:r>
-            <a:r>
-              <a:rPr>
-                <a:solidFill>
-                  <a:srgbClr val="4758AB"/>
-                </a:solidFill>
-                <a:latin typeface="Courier"/>
-              </a:rPr>
-              <a:t>round</a:t>
-            </a:r>
-            <a:r>
-              <a:rPr>
-                <a:solidFill>
-                  <a:srgbClr val="003B4F"/>
-                </a:solidFill>
-                <a:latin typeface="Courier"/>
-              </a:rPr>
-              <a:t>(</a:t>
-            </a:r>
-            <a:r>
-              <a:rPr>
-                <a:solidFill>
-                  <a:srgbClr val="4758AB"/>
-                </a:solidFill>
-                <a:latin typeface="Courier"/>
-              </a:rPr>
-              <a:t>sd</a:t>
-            </a:r>
-            <a:r>
-              <a:rPr>
-                <a:solidFill>
-                  <a:srgbClr val="003B4F"/>
-                </a:solidFill>
-                <a:latin typeface="Courier"/>
-              </a:rPr>
-              <a:t>(length_mm, </a:t>
-            </a:r>
-            <a:r>
-              <a:rPr>
-                <a:solidFill>
-                  <a:srgbClr val="657422"/>
-                </a:solidFill>
-                <a:latin typeface="Courier"/>
-              </a:rPr>
-              <a:t>na.rm =</a:t>
-            </a:r>
-            <a:r>
-              <a:rPr>
-                <a:solidFill>
-                  <a:srgbClr val="003B4F"/>
-                </a:solidFill>
-                <a:latin typeface="Courier"/>
-              </a:rPr>
-              <a:t> </a:t>
-            </a:r>
-            <a:r>
-              <a:rPr>
-                <a:solidFill>
-                  <a:srgbClr val="8F5902"/>
-                </a:solidFill>
-                <a:latin typeface="Courier"/>
-              </a:rPr>
-              <a:t>TRUE</a:t>
-            </a:r>
-            <a:r>
-              <a:rPr>
-                <a:solidFill>
-                  <a:srgbClr val="003B4F"/>
-                </a:solidFill>
-                <a:latin typeface="Courier"/>
-              </a:rPr>
-              <a:t>) </a:t>
-            </a:r>
-            <a:r>
-              <a:rPr>
-                <a:solidFill>
-                  <a:srgbClr val="5E5E5E"/>
-                </a:solidFill>
-                <a:latin typeface="Courier"/>
-              </a:rPr>
-              <a:t>/</a:t>
-            </a:r>
-            <a:r>
-              <a:rPr>
-                <a:solidFill>
-                  <a:srgbClr val="003B4F"/>
-                </a:solidFill>
-                <a:latin typeface="Courier"/>
-              </a:rPr>
-              <a:t> </a:t>
-            </a:r>
-            <a:r>
-              <a:rPr>
-                <a:solidFill>
-                  <a:srgbClr val="4758AB"/>
-                </a:solidFill>
-                <a:latin typeface="Courier"/>
-              </a:rPr>
               <a:t>sqrt</a:t>
             </a:r>
             <a:r>
@@ -14013,7 +14228,7 @@
                 </a:solidFill>
                 <a:latin typeface="Courier"/>
               </a:rPr>
-              <a:t>(n), </a:t>
+              <a:t>(n_trees), </a:t>
             </a:r>
             <a:r>
               <a:rPr>
@@ -14052,7 +14267,7 @@
                 </a:solidFill>
                 <a:latin typeface="Courier"/>
               </a:rPr>
-              <a:t>size_class_stats_df</a:t>
+              <a:t>side_correct_df</a:t>
             </a:r>
           </a:p>
           <a:p>
@@ -14063,12 +14278,11 @@
               <a:rPr>
                 <a:latin typeface="Courier"/>
               </a:rPr>
-              <a:t># A tibble: 3 × 4
-  size_class     n mean_mm se_mm
-  &lt;chr&gt;      &lt;int&gt;   &lt;dbl&gt; &lt;dbl&gt;
-1 long          16    21.8  0.42
-2 medium        17    17.3  0.28
-3 short         15    13.7  0.3 </a:t>
+              <a:t># A tibble: 2 × 4
+  side  n_trees mean_mm se_mm
+  &lt;chr&gt;   &lt;int&gt;   &lt;dbl&gt; &lt;dbl&gt;
+1 shady       4    14.1  1.01
+2 sunny       4    15.2  0.79</a:t>
             </a:r>
           </a:p>
         </p:txBody>
@@ -14102,23 +14316,13 @@
             </a:pPr>
             <a:r>
               <a:rPr sz="2000" b="1"/>
-              <a:t>✅ Key idea</a:t>
+              <a:t>✅ The pattern</a:t>
             </a:r>
           </a:p>
           <a:p>
             <a:pPr lvl="0" indent="0" marL="1270000">
               <a:buNone/>
             </a:pPr>
-            <a:r>
-              <a:rPr sz="2000">
-                <a:latin typeface="Courier"/>
-              </a:rPr>
-              <a:t>mutate()</a:t>
-            </a:r>
-            <a:r>
-              <a:rPr sz="2000"/>
-              <a:t> and </a:t>
-            </a:r>
             <a:r>
               <a:rPr sz="2000">
                 <a:latin typeface="Courier"/>
@@ -14137,17 +14341,24 @@
             </a:r>
             <a:r>
               <a:rPr sz="2000"/>
-              <a:t> chain together like any other verbs — you don’t need to save the </a:t>
-            </a:r>
-            <a:r>
-              <a:rPr sz="2000">
-                <a:latin typeface="Courier"/>
-              </a:rPr>
-              <a:t>case_when()</a:t>
+              <a:t> </a:t>
+            </a:r>
+            <a:r>
+              <a:rPr sz="2000" b="1"/>
+              <a:t>twice</a:t>
             </a:r>
             <a:r>
               <a:rPr sz="2000"/>
-              <a:t> column separately first. This is the wrangling → describing pipeline in one block.</a:t>
+              <a:t>: once to get down to the unit you actually replicated, once to describe those units.</a:t>
+            </a:r>
+          </a:p>
+          <a:p>
+            <a:pPr lvl="0" indent="0" marL="1270000">
+              <a:buNone/>
+            </a:pPr>
+            <a:r>
+              <a:rPr sz="2000"/>
+              <a:t>You will use this pattern for the rest of the course.</a:t>
             </a:r>
           </a:p>
         </p:txBody>
@@ -14202,6 +14413,1484 @@
             </a:pPr>
             <a:r>
               <a:rPr/>
+              <a:t>What changed, and what didn’t</a:t>
+            </a:r>
+          </a:p>
+        </p:txBody>
+      </p:sp>
+      <p:graphicFrame>
+        <p:nvGraphicFramePr>
+          <p:cNvPr id="6" name="Content Placeholder 5"/>
+          <p:cNvGraphicFramePr>
+            <a:graphicFrameLocks noGrp="1"/>
+          </p:cNvGraphicFramePr>
+          <p:nvPr>
+            <p:ph idx="1"/>
+          </p:nvPr>
+        </p:nvGraphicFramePr>
+        <p:xfrm>
+          <a:off x="0" y="660400"/>
+          <a:ext cx="6007100" cy="4470400"/>
+        </p:xfrm>
+        <a:graphic>
+          <a:graphicData uri="http://schemas.openxmlformats.org/drawingml/2006/table">
+            <a:tbl>
+              <a:tblPr firstRow="1" bandRow="1">
+                <a:tableStyleId>{5C22544A-7EE6-4342-B048-85BDC9FD1C3A}</a:tableStyleId>
+              </a:tblPr>
+              <a:tblGrid>
+                <a:gridCol w="1993900"/>
+                <a:gridCol w="1993900"/>
+                <a:gridCol w="1993900"/>
+              </a:tblGrid>
+              <a:tr h="0">
+                <a:tc>
+                  <a:txBody>
+                    <a:bodyPr/>
+                    <a:lstStyle/>
+                    <a:p>
+                      <a:endParaRPr/>
+                    </a:p>
+                  </a:txBody>
+                  <a:tcPr/>
+                </a:tc>
+                <a:tc>
+                  <a:txBody>
+                    <a:bodyPr/>
+                    <a:lstStyle/>
+                    <a:p>
+                      <a:pPr lvl="0" indent="0" marL="0">
+                        <a:buNone/>
+                      </a:pPr>
+                      <a:r>
+                        <a:rPr/>
+                        <a:t>naive (n = 32 needles)</a:t>
+                      </a:r>
+                    </a:p>
+                  </a:txBody>
+                  <a:tcPr/>
+                </a:tc>
+                <a:tc>
+                  <a:txBody>
+                    <a:bodyPr/>
+                    <a:lstStyle/>
+                    <a:p>
+                      <a:pPr lvl="0" indent="0" marL="0">
+                        <a:buNone/>
+                      </a:pPr>
+                      <a:r>
+                        <a:rPr/>
+                        <a:t>correct (n = 4 trees)</a:t>
+                      </a:r>
+                    </a:p>
+                  </a:txBody>
+                  <a:tcPr/>
+                </a:tc>
+              </a:tr>
+              <a:tr h="0">
+                <a:tc>
+                  <a:txBody>
+                    <a:bodyPr/>
+                    <a:lstStyle/>
+                    <a:p>
+                      <a:pPr lvl="0" indent="0" marL="0">
+                        <a:buNone/>
+                      </a:pPr>
+                      <a:r>
+                        <a:rPr/>
+                        <a:t>mean, shady</a:t>
+                      </a:r>
+                    </a:p>
+                  </a:txBody>
+                </a:tc>
+                <a:tc>
+                  <a:txBody>
+                    <a:bodyPr/>
+                    <a:lstStyle/>
+                    <a:p>
+                      <a:pPr lvl="0" indent="0" marL="0">
+                        <a:buNone/>
+                      </a:pPr>
+                      <a:r>
+                        <a:rPr/>
+                        <a:t>14.12</a:t>
+                      </a:r>
+                    </a:p>
+                  </a:txBody>
+                </a:tc>
+                <a:tc>
+                  <a:txBody>
+                    <a:bodyPr/>
+                    <a:lstStyle/>
+                    <a:p>
+                      <a:pPr lvl="0" indent="0" marL="0">
+                        <a:buNone/>
+                      </a:pPr>
+                      <a:r>
+                        <a:rPr b="1"/>
+                        <a:t>14.12</a:t>
+                      </a:r>
+                    </a:p>
+                  </a:txBody>
+                </a:tc>
+              </a:tr>
+              <a:tr h="0">
+                <a:tc>
+                  <a:txBody>
+                    <a:bodyPr/>
+                    <a:lstStyle/>
+                    <a:p>
+                      <a:pPr lvl="0" indent="0" marL="0">
+                        <a:buNone/>
+                      </a:pPr>
+                      <a:r>
+                        <a:rPr/>
+                        <a:t>mean, sunny</a:t>
+                      </a:r>
+                    </a:p>
+                  </a:txBody>
+                </a:tc>
+                <a:tc>
+                  <a:txBody>
+                    <a:bodyPr/>
+                    <a:lstStyle/>
+                    <a:p>
+                      <a:pPr lvl="0" indent="0" marL="0">
+                        <a:buNone/>
+                      </a:pPr>
+                      <a:r>
+                        <a:rPr/>
+                        <a:t>15.21</a:t>
+                      </a:r>
+                    </a:p>
+                  </a:txBody>
+                </a:tc>
+                <a:tc>
+                  <a:txBody>
+                    <a:bodyPr/>
+                    <a:lstStyle/>
+                    <a:p>
+                      <a:pPr lvl="0" indent="0" marL="0">
+                        <a:buNone/>
+                      </a:pPr>
+                      <a:r>
+                        <a:rPr b="1"/>
+                        <a:t>15.21</a:t>
+                      </a:r>
+                    </a:p>
+                  </a:txBody>
+                </a:tc>
+              </a:tr>
+              <a:tr h="0">
+                <a:tc>
+                  <a:txBody>
+                    <a:bodyPr/>
+                    <a:lstStyle/>
+                    <a:p>
+                      <a:pPr lvl="0" indent="0" marL="0">
+                        <a:buNone/>
+                      </a:pPr>
+                      <a:r>
+                        <a:rPr/>
+                        <a:t>SE, shady</a:t>
+                      </a:r>
+                    </a:p>
+                  </a:txBody>
+                </a:tc>
+                <a:tc>
+                  <a:txBody>
+                    <a:bodyPr/>
+                    <a:lstStyle/>
+                    <a:p>
+                      <a:pPr lvl="0" indent="0" marL="0">
+                        <a:buNone/>
+                      </a:pPr>
+                      <a:r>
+                        <a:rPr/>
+                        <a:t>0.49</a:t>
+                      </a:r>
+                    </a:p>
+                  </a:txBody>
+                </a:tc>
+                <a:tc>
+                  <a:txBody>
+                    <a:bodyPr/>
+                    <a:lstStyle/>
+                    <a:p>
+                      <a:pPr lvl="0" indent="0" marL="0">
+                        <a:buNone/>
+                      </a:pPr>
+                      <a:r>
+                        <a:rPr b="1"/>
+                        <a:t>1.01</a:t>
+                      </a:r>
+                    </a:p>
+                  </a:txBody>
+                </a:tc>
+              </a:tr>
+              <a:tr h="0">
+                <a:tc>
+                  <a:txBody>
+                    <a:bodyPr/>
+                    <a:lstStyle/>
+                    <a:p>
+                      <a:pPr lvl="0" indent="0" marL="0">
+                        <a:buNone/>
+                      </a:pPr>
+                      <a:r>
+                        <a:rPr/>
+                        <a:t>SE, sunny</a:t>
+                      </a:r>
+                    </a:p>
+                  </a:txBody>
+                </a:tc>
+                <a:tc>
+                  <a:txBody>
+                    <a:bodyPr/>
+                    <a:lstStyle/>
+                    <a:p>
+                      <a:pPr lvl="0" indent="0" marL="0">
+                        <a:buNone/>
+                      </a:pPr>
+                      <a:r>
+                        <a:rPr/>
+                        <a:t>0.46</a:t>
+                      </a:r>
+                    </a:p>
+                  </a:txBody>
+                </a:tc>
+                <a:tc>
+                  <a:txBody>
+                    <a:bodyPr/>
+                    <a:lstStyle/>
+                    <a:p>
+                      <a:pPr lvl="0" indent="0" marL="0">
+                        <a:buNone/>
+                      </a:pPr>
+                      <a:r>
+                        <a:rPr b="1"/>
+                        <a:t>0.79</a:t>
+                      </a:r>
+                    </a:p>
+                  </a:txBody>
+                </a:tc>
+              </a:tr>
+            </a:tbl>
+          </a:graphicData>
+        </a:graphic>
+      </p:graphicFrame>
+      <p:sp>
+        <p:nvSpPr>
+          <p:cNvPr id="4" name="Content Placeholder 3"/>
+          <p:cNvSpPr>
+            <a:spLocks noGrp="1"/>
+          </p:cNvSpPr>
+          <p:nvPr>
+            <p:ph idx="2" sz="half"/>
+          </p:nvPr>
+        </p:nvSpPr>
+        <p:spPr/>
+        <p:txBody>
+          <a:bodyPr/>
+          <a:lstStyle/>
+          <a:p>
+            <a:pPr lvl="0" indent="0" marL="1270000">
+              <a:buNone/>
+            </a:pPr>
+            <a:r>
+              <a:rPr sz="2000" b="1"/>
+              <a:t>Tip</a:t>
+            </a:r>
+          </a:p>
+          <a:p>
+            <a:pPr lvl="0" indent="0" marL="1270000">
+              <a:buNone/>
+            </a:pPr>
+            <a:r>
+              <a:rPr sz="2000" b="1"/>
+              <a:t>🖐 Coming in Week 4</a:t>
+            </a:r>
+          </a:p>
+          <a:p>
+            <a:pPr lvl="0" indent="0" marL="1270000">
+              <a:buNone/>
+            </a:pPr>
+            <a:r>
+              <a:rPr sz="2000"/>
+              <a:t>An SE that is twice as big makes a difference that is much harder to call real. That is exactly what we will see when we run the t-test — and why the </a:t>
+            </a:r>
+            <a:r>
+              <a:rPr sz="2000" b="1"/>
+              <a:t>paired</a:t>
+            </a:r>
+            <a:r>
+              <a:rPr sz="2000"/>
+              <a:t> test, which respects the tree structure, is the honest one.</a:t>
+            </a:r>
+          </a:p>
+        </p:txBody>
+      </p:sp>
+    </p:spTree>
+  </p:cSld>
+</p:sld>
+</file>
+
+<file path=ppt/slides/slide34.xml><?xml version="1.0" encoding="utf-8"?>
+<p:sld xmlns:a="http://schemas.openxmlformats.org/drawingml/2006/main" xmlns:r="http://schemas.openxmlformats.org/officeDocument/2006/relationships" xmlns:p="http://schemas.openxmlformats.org/presentationml/2006/main">
+  <p:cSld>
+    <p:spTree>
+      <p:nvGrpSpPr>
+        <p:cNvPr id="1" name=""/>
+        <p:cNvGrpSpPr/>
+        <p:nvPr/>
+      </p:nvGrpSpPr>
+      <p:grpSpPr>
+        <a:xfrm>
+          <a:off x="0" y="0"/>
+          <a:ext cx="0" cy="0"/>
+          <a:chOff x="0" y="0"/>
+          <a:chExt cx="0" cy="0"/>
+        </a:xfrm>
+      </p:grpSpPr>
+      <p:sp>
+        <p:nvSpPr>
+          <p:cNvPr id="2" name="Title 1"/>
+          <p:cNvSpPr>
+            <a:spLocks noGrp="1"/>
+          </p:cNvSpPr>
+          <p:nvPr>
+            <p:ph type="title"/>
+          </p:nvPr>
+        </p:nvSpPr>
+        <p:spPr>
+          <a:xfrm>
+            <a:off x="0" y="0"/>
+            <a:ext cx="9144000" cy="582780"/>
+          </a:xfrm>
+        </p:spPr>
+        <p:txBody>
+          <a:bodyPr/>
+          <a:lstStyle/>
+          <a:p>
+            <a:pPr lvl="0" indent="0" marL="0">
+              <a:buNone/>
+            </a:pPr>
+            <a:r>
+              <a:rPr/>
+              <a:t>Part 7b · Bringing Back </a:t>
+            </a:r>
+            <a:r>
+              <a:rPr>
+                <a:latin typeface="Courier"/>
+              </a:rPr>
+              <a:t>case_when()</a:t>
+            </a:r>
+            <a:r>
+              <a:rPr/>
+              <a:t> from Wrangling Your Data</a:t>
+            </a:r>
+          </a:p>
+        </p:txBody>
+      </p:sp>
+    </p:spTree>
+  </p:cSld>
+</p:sld>
+</file>
+
+<file path=ppt/slides/slide35.xml><?xml version="1.0" encoding="utf-8"?>
+<p:sld xmlns:a="http://schemas.openxmlformats.org/drawingml/2006/main" xmlns:r="http://schemas.openxmlformats.org/officeDocument/2006/relationships" xmlns:p="http://schemas.openxmlformats.org/presentationml/2006/main">
+  <p:cSld>
+    <p:spTree>
+      <p:nvGrpSpPr>
+        <p:cNvPr id="1" name=""/>
+        <p:cNvGrpSpPr/>
+        <p:nvPr/>
+      </p:nvGrpSpPr>
+      <p:grpSpPr>
+        <a:xfrm>
+          <a:off x="0" y="0"/>
+          <a:ext cx="0" cy="0"/>
+          <a:chOff x="0" y="0"/>
+          <a:chExt cx="0" cy="0"/>
+        </a:xfrm>
+      </p:grpSpPr>
+      <p:sp>
+        <p:nvSpPr>
+          <p:cNvPr id="2" name="Title 1"/>
+          <p:cNvSpPr>
+            <a:spLocks noGrp="1"/>
+          </p:cNvSpPr>
+          <p:nvPr>
+            <p:ph type="title"/>
+          </p:nvPr>
+        </p:nvSpPr>
+        <p:spPr>
+          <a:xfrm>
+            <a:off x="0" y="0"/>
+            <a:ext cx="9144000" cy="582780"/>
+          </a:xfrm>
+        </p:spPr>
+        <p:txBody>
+          <a:bodyPr/>
+          <a:lstStyle/>
+          <a:p>
+            <a:pPr lvl="0" indent="0" marL="0">
+              <a:buNone/>
+            </a:pPr>
+            <a:r>
+              <a:rPr/>
+              <a:t>Summarizing the Categories You Built Last Class</a:t>
+            </a:r>
+          </a:p>
+        </p:txBody>
+      </p:sp>
+      <p:sp>
+        <p:nvSpPr>
+          <p:cNvPr id="3" name="Content Placeholder 2"/>
+          <p:cNvSpPr>
+            <a:spLocks noGrp="1"/>
+          </p:cNvSpPr>
+          <p:nvPr>
+            <p:ph idx="1"/>
+          </p:nvPr>
+        </p:nvSpPr>
+        <p:spPr/>
+        <p:txBody>
+          <a:bodyPr/>
+          <a:lstStyle/>
+          <a:p>
+            <a:pPr lvl="0" indent="0" marL="1270000">
+              <a:buNone/>
+            </a:pPr>
+            <a:r>
+              <a:rPr sz="2000" b="1"/>
+              <a:t>Note</a:t>
+            </a:r>
+          </a:p>
+          <a:p>
+            <a:pPr lvl="0" indent="0" marL="1270000">
+              <a:buNone/>
+            </a:pPr>
+            <a:r>
+              <a:rPr sz="2000" b="1"/>
+              <a:t>🔮 Predict first:</a:t>
+            </a:r>
+            <a:r>
+              <a:rPr sz="2000"/>
+              <a:t> We’re grouping by the </a:t>
+            </a:r>
+            <a:r>
+              <a:rPr sz="2000">
+                <a:latin typeface="Courier"/>
+              </a:rPr>
+              <a:t>size_class</a:t>
+            </a:r>
+            <a:r>
+              <a:rPr sz="2000"/>
+              <a:t> bins (</a:t>
+            </a:r>
+            <a:r>
+              <a:rPr sz="2000">
+                <a:latin typeface="Courier"/>
+              </a:rPr>
+              <a:t>"short"</a:t>
+            </a:r>
+            <a:r>
+              <a:rPr sz="2000"/>
+              <a:t>/</a:t>
+            </a:r>
+            <a:r>
+              <a:rPr sz="2000">
+                <a:latin typeface="Courier"/>
+              </a:rPr>
+              <a:t>"medium"</a:t>
+            </a:r>
+            <a:r>
+              <a:rPr sz="2000"/>
+              <a:t>/</a:t>
+            </a:r>
+            <a:r>
+              <a:rPr sz="2000">
+                <a:latin typeface="Courier"/>
+              </a:rPr>
+              <a:t>"long"</a:t>
+            </a:r>
+            <a:r>
+              <a:rPr sz="2000"/>
+              <a:t>) from Wrangling Your Data’s </a:t>
+            </a:r>
+            <a:r>
+              <a:rPr sz="2000">
+                <a:latin typeface="Courier"/>
+              </a:rPr>
+              <a:t>case_when()</a:t>
+            </a:r>
+            <a:r>
+              <a:rPr sz="2000"/>
+              <a:t>. How many rows will the summary have?</a:t>
+            </a:r>
+          </a:p>
+        </p:txBody>
+      </p:sp>
+    </p:spTree>
+  </p:cSld>
+</p:sld>
+</file>
+
+<file path=ppt/slides/slide36.xml><?xml version="1.0" encoding="utf-8"?>
+<p:sld xmlns:a="http://schemas.openxmlformats.org/drawingml/2006/main" xmlns:r="http://schemas.openxmlformats.org/officeDocument/2006/relationships" xmlns:p="http://schemas.openxmlformats.org/presentationml/2006/main">
+  <p:cSld>
+    <p:spTree>
+      <p:nvGrpSpPr>
+        <p:cNvPr id="1" name=""/>
+        <p:cNvGrpSpPr/>
+        <p:nvPr/>
+      </p:nvGrpSpPr>
+      <p:grpSpPr>
+        <a:xfrm>
+          <a:off x="0" y="0"/>
+          <a:ext cx="0" cy="0"/>
+          <a:chOff x="0" y="0"/>
+          <a:chExt cx="0" cy="0"/>
+        </a:xfrm>
+      </p:grpSpPr>
+      <p:sp>
+        <p:nvSpPr>
+          <p:cNvPr id="3" name="Content Placeholder 2"/>
+          <p:cNvSpPr>
+            <a:spLocks noGrp="1"/>
+          </p:cNvSpPr>
+          <p:nvPr>
+            <p:ph idx="1" sz="half"/>
+          </p:nvPr>
+        </p:nvSpPr>
+        <p:spPr/>
+        <p:txBody>
+          <a:bodyPr/>
+          <a:lstStyle/>
+          <a:p>
+            <a:pPr lvl="0" indent="0">
+              <a:buNone/>
+            </a:pPr>
+            <a:r>
+              <a:rPr>
+                <a:solidFill>
+                  <a:srgbClr val="003B4F"/>
+                </a:solidFill>
+                <a:latin typeface="Courier"/>
+              </a:rPr>
+              <a:t>size_class_stats_df &lt;- pine_df </a:t>
+            </a:r>
+            <a:r>
+              <a:rPr>
+                <a:solidFill>
+                  <a:srgbClr val="5E5E5E"/>
+                </a:solidFill>
+                <a:latin typeface="Courier"/>
+              </a:rPr>
+              <a:t>|&gt;</a:t>
+            </a:r>
+            <a:br/>
+            <a:r>
+              <a:rPr>
+                <a:solidFill>
+                  <a:srgbClr val="003B4F"/>
+                </a:solidFill>
+                <a:latin typeface="Courier"/>
+              </a:rPr>
+              <a:t>  </a:t>
+            </a:r>
+            <a:r>
+              <a:rPr>
+                <a:solidFill>
+                  <a:srgbClr val="4758AB"/>
+                </a:solidFill>
+                <a:latin typeface="Courier"/>
+              </a:rPr>
+              <a:t>mutate</a:t>
+            </a:r>
+            <a:r>
+              <a:rPr>
+                <a:solidFill>
+                  <a:srgbClr val="003B4F"/>
+                </a:solidFill>
+                <a:latin typeface="Courier"/>
+              </a:rPr>
+              <a:t>(</a:t>
+            </a:r>
+            <a:br/>
+            <a:r>
+              <a:rPr>
+                <a:solidFill>
+                  <a:srgbClr val="003B4F"/>
+                </a:solidFill>
+                <a:latin typeface="Courier"/>
+              </a:rPr>
+              <a:t>    </a:t>
+            </a:r>
+            <a:r>
+              <a:rPr>
+                <a:solidFill>
+                  <a:srgbClr val="657422"/>
+                </a:solidFill>
+                <a:latin typeface="Courier"/>
+              </a:rPr>
+              <a:t>size_class =</a:t>
+            </a:r>
+            <a:r>
+              <a:rPr>
+                <a:solidFill>
+                  <a:srgbClr val="003B4F"/>
+                </a:solidFill>
+                <a:latin typeface="Courier"/>
+              </a:rPr>
+              <a:t> </a:t>
+            </a:r>
+            <a:r>
+              <a:rPr>
+                <a:solidFill>
+                  <a:srgbClr val="4758AB"/>
+                </a:solidFill>
+                <a:latin typeface="Courier"/>
+              </a:rPr>
+              <a:t>case_when</a:t>
+            </a:r>
+            <a:r>
+              <a:rPr>
+                <a:solidFill>
+                  <a:srgbClr val="003B4F"/>
+                </a:solidFill>
+                <a:latin typeface="Courier"/>
+              </a:rPr>
+              <a:t>(</a:t>
+            </a:r>
+            <a:br/>
+            <a:r>
+              <a:rPr>
+                <a:solidFill>
+                  <a:srgbClr val="003B4F"/>
+                </a:solidFill>
+                <a:latin typeface="Courier"/>
+              </a:rPr>
+              <a:t>      needle_length_mm </a:t>
+            </a:r>
+            <a:r>
+              <a:rPr>
+                <a:solidFill>
+                  <a:srgbClr val="5E5E5E"/>
+                </a:solidFill>
+                <a:latin typeface="Courier"/>
+              </a:rPr>
+              <a:t>&lt;</a:t>
+            </a:r>
+            <a:r>
+              <a:rPr>
+                <a:solidFill>
+                  <a:srgbClr val="003B4F"/>
+                </a:solidFill>
+                <a:latin typeface="Courier"/>
+              </a:rPr>
+              <a:t> </a:t>
+            </a:r>
+            <a:r>
+              <a:rPr>
+                <a:solidFill>
+                  <a:srgbClr val="AD0000"/>
+                </a:solidFill>
+                <a:latin typeface="Courier"/>
+              </a:rPr>
+              <a:t>13</a:t>
+            </a:r>
+            <a:r>
+              <a:rPr>
+                <a:solidFill>
+                  <a:srgbClr val="003B4F"/>
+                </a:solidFill>
+                <a:latin typeface="Courier"/>
+              </a:rPr>
+              <a:t> </a:t>
+            </a:r>
+            <a:r>
+              <a:rPr>
+                <a:solidFill>
+                  <a:srgbClr val="5E5E5E"/>
+                </a:solidFill>
+                <a:latin typeface="Courier"/>
+              </a:rPr>
+              <a:t>~</a:t>
+            </a:r>
+            <a:r>
+              <a:rPr>
+                <a:solidFill>
+                  <a:srgbClr val="003B4F"/>
+                </a:solidFill>
+                <a:latin typeface="Courier"/>
+              </a:rPr>
+              <a:t> </a:t>
+            </a:r>
+            <a:r>
+              <a:rPr>
+                <a:solidFill>
+                  <a:srgbClr val="20794D"/>
+                </a:solidFill>
+                <a:latin typeface="Courier"/>
+              </a:rPr>
+              <a:t>"short"</a:t>
+            </a:r>
+            <a:r>
+              <a:rPr>
+                <a:solidFill>
+                  <a:srgbClr val="003B4F"/>
+                </a:solidFill>
+                <a:latin typeface="Courier"/>
+              </a:rPr>
+              <a:t>,</a:t>
+            </a:r>
+            <a:br/>
+            <a:r>
+              <a:rPr>
+                <a:solidFill>
+                  <a:srgbClr val="003B4F"/>
+                </a:solidFill>
+                <a:latin typeface="Courier"/>
+              </a:rPr>
+              <a:t>      needle_length_mm </a:t>
+            </a:r>
+            <a:r>
+              <a:rPr>
+                <a:solidFill>
+                  <a:srgbClr val="5E5E5E"/>
+                </a:solidFill>
+                <a:latin typeface="Courier"/>
+              </a:rPr>
+              <a:t>&lt;</a:t>
+            </a:r>
+            <a:r>
+              <a:rPr>
+                <a:solidFill>
+                  <a:srgbClr val="003B4F"/>
+                </a:solidFill>
+                <a:latin typeface="Courier"/>
+              </a:rPr>
+              <a:t> </a:t>
+            </a:r>
+            <a:r>
+              <a:rPr>
+                <a:solidFill>
+                  <a:srgbClr val="AD0000"/>
+                </a:solidFill>
+                <a:latin typeface="Courier"/>
+              </a:rPr>
+              <a:t>16</a:t>
+            </a:r>
+            <a:r>
+              <a:rPr>
+                <a:solidFill>
+                  <a:srgbClr val="003B4F"/>
+                </a:solidFill>
+                <a:latin typeface="Courier"/>
+              </a:rPr>
+              <a:t> </a:t>
+            </a:r>
+            <a:r>
+              <a:rPr>
+                <a:solidFill>
+                  <a:srgbClr val="5E5E5E"/>
+                </a:solidFill>
+                <a:latin typeface="Courier"/>
+              </a:rPr>
+              <a:t>~</a:t>
+            </a:r>
+            <a:r>
+              <a:rPr>
+                <a:solidFill>
+                  <a:srgbClr val="003B4F"/>
+                </a:solidFill>
+                <a:latin typeface="Courier"/>
+              </a:rPr>
+              <a:t> </a:t>
+            </a:r>
+            <a:r>
+              <a:rPr>
+                <a:solidFill>
+                  <a:srgbClr val="20794D"/>
+                </a:solidFill>
+                <a:latin typeface="Courier"/>
+              </a:rPr>
+              <a:t>"medium"</a:t>
+            </a:r>
+            <a:r>
+              <a:rPr>
+                <a:solidFill>
+                  <a:srgbClr val="003B4F"/>
+                </a:solidFill>
+                <a:latin typeface="Courier"/>
+              </a:rPr>
+              <a:t>,</a:t>
+            </a:r>
+            <a:br/>
+            <a:r>
+              <a:rPr>
+                <a:solidFill>
+                  <a:srgbClr val="003B4F"/>
+                </a:solidFill>
+                <a:latin typeface="Courier"/>
+              </a:rPr>
+              <a:t>      </a:t>
+            </a:r>
+            <a:r>
+              <a:rPr>
+                <a:solidFill>
+                  <a:srgbClr val="8F5902"/>
+                </a:solidFill>
+                <a:latin typeface="Courier"/>
+              </a:rPr>
+              <a:t>TRUE</a:t>
+            </a:r>
+            <a:r>
+              <a:rPr>
+                <a:solidFill>
+                  <a:srgbClr val="003B4F"/>
+                </a:solidFill>
+                <a:latin typeface="Courier"/>
+              </a:rPr>
+              <a:t>                  </a:t>
+            </a:r>
+            <a:r>
+              <a:rPr>
+                <a:solidFill>
+                  <a:srgbClr val="5E5E5E"/>
+                </a:solidFill>
+                <a:latin typeface="Courier"/>
+              </a:rPr>
+              <a:t>~</a:t>
+            </a:r>
+            <a:r>
+              <a:rPr>
+                <a:solidFill>
+                  <a:srgbClr val="003B4F"/>
+                </a:solidFill>
+                <a:latin typeface="Courier"/>
+              </a:rPr>
+              <a:t> </a:t>
+            </a:r>
+            <a:r>
+              <a:rPr>
+                <a:solidFill>
+                  <a:srgbClr val="20794D"/>
+                </a:solidFill>
+                <a:latin typeface="Courier"/>
+              </a:rPr>
+              <a:t>"long"</a:t>
+            </a:r>
+            <a:br/>
+            <a:r>
+              <a:rPr>
+                <a:solidFill>
+                  <a:srgbClr val="003B4F"/>
+                </a:solidFill>
+                <a:latin typeface="Courier"/>
+              </a:rPr>
+              <a:t>    )</a:t>
+            </a:r>
+            <a:br/>
+            <a:r>
+              <a:rPr>
+                <a:solidFill>
+                  <a:srgbClr val="003B4F"/>
+                </a:solidFill>
+                <a:latin typeface="Courier"/>
+              </a:rPr>
+              <a:t>  ) </a:t>
+            </a:r>
+            <a:r>
+              <a:rPr>
+                <a:solidFill>
+                  <a:srgbClr val="5E5E5E"/>
+                </a:solidFill>
+                <a:latin typeface="Courier"/>
+              </a:rPr>
+              <a:t>|&gt;</a:t>
+            </a:r>
+            <a:br/>
+            <a:r>
+              <a:rPr>
+                <a:solidFill>
+                  <a:srgbClr val="003B4F"/>
+                </a:solidFill>
+                <a:latin typeface="Courier"/>
+              </a:rPr>
+              <a:t>  </a:t>
+            </a:r>
+            <a:r>
+              <a:rPr>
+                <a:solidFill>
+                  <a:srgbClr val="4758AB"/>
+                </a:solidFill>
+                <a:latin typeface="Courier"/>
+              </a:rPr>
+              <a:t>group_by</a:t>
+            </a:r>
+            <a:r>
+              <a:rPr>
+                <a:solidFill>
+                  <a:srgbClr val="003B4F"/>
+                </a:solidFill>
+                <a:latin typeface="Courier"/>
+              </a:rPr>
+              <a:t>(size_class) </a:t>
+            </a:r>
+            <a:r>
+              <a:rPr>
+                <a:solidFill>
+                  <a:srgbClr val="5E5E5E"/>
+                </a:solidFill>
+                <a:latin typeface="Courier"/>
+              </a:rPr>
+              <a:t>|&gt;</a:t>
+            </a:r>
+            <a:br/>
+            <a:r>
+              <a:rPr>
+                <a:solidFill>
+                  <a:srgbClr val="003B4F"/>
+                </a:solidFill>
+                <a:latin typeface="Courier"/>
+              </a:rPr>
+              <a:t>  </a:t>
+            </a:r>
+            <a:r>
+              <a:rPr>
+                <a:solidFill>
+                  <a:srgbClr val="4758AB"/>
+                </a:solidFill>
+                <a:latin typeface="Courier"/>
+              </a:rPr>
+              <a:t>summarize</a:t>
+            </a:r>
+            <a:r>
+              <a:rPr>
+                <a:solidFill>
+                  <a:srgbClr val="003B4F"/>
+                </a:solidFill>
+                <a:latin typeface="Courier"/>
+              </a:rPr>
+              <a:t>(</a:t>
+            </a:r>
+            <a:br/>
+            <a:r>
+              <a:rPr>
+                <a:solidFill>
+                  <a:srgbClr val="003B4F"/>
+                </a:solidFill>
+                <a:latin typeface="Courier"/>
+              </a:rPr>
+              <a:t>    </a:t>
+            </a:r>
+            <a:r>
+              <a:rPr>
+                <a:solidFill>
+                  <a:srgbClr val="657422"/>
+                </a:solidFill>
+                <a:latin typeface="Courier"/>
+              </a:rPr>
+              <a:t>n       =</a:t>
+            </a:r>
+            <a:r>
+              <a:rPr>
+                <a:solidFill>
+                  <a:srgbClr val="003B4F"/>
+                </a:solidFill>
+                <a:latin typeface="Courier"/>
+              </a:rPr>
+              <a:t> </a:t>
+            </a:r>
+            <a:r>
+              <a:rPr>
+                <a:solidFill>
+                  <a:srgbClr val="4758AB"/>
+                </a:solidFill>
+                <a:latin typeface="Courier"/>
+              </a:rPr>
+              <a:t>sum</a:t>
+            </a:r>
+            <a:r>
+              <a:rPr>
+                <a:solidFill>
+                  <a:srgbClr val="003B4F"/>
+                </a:solidFill>
+                <a:latin typeface="Courier"/>
+              </a:rPr>
+              <a:t>(</a:t>
+            </a:r>
+            <a:r>
+              <a:rPr>
+                <a:solidFill>
+                  <a:srgbClr val="5E5E5E"/>
+                </a:solidFill>
+                <a:latin typeface="Courier"/>
+              </a:rPr>
+              <a:t>!</a:t>
+            </a:r>
+            <a:r>
+              <a:rPr>
+                <a:solidFill>
+                  <a:srgbClr val="4758AB"/>
+                </a:solidFill>
+                <a:latin typeface="Courier"/>
+              </a:rPr>
+              <a:t>is.na</a:t>
+            </a:r>
+            <a:r>
+              <a:rPr>
+                <a:solidFill>
+                  <a:srgbClr val="003B4F"/>
+                </a:solidFill>
+                <a:latin typeface="Courier"/>
+              </a:rPr>
+              <a:t>(needle_length_mm)),</a:t>
+            </a:r>
+            <a:br/>
+            <a:r>
+              <a:rPr>
+                <a:solidFill>
+                  <a:srgbClr val="003B4F"/>
+                </a:solidFill>
+                <a:latin typeface="Courier"/>
+              </a:rPr>
+              <a:t>    </a:t>
+            </a:r>
+            <a:r>
+              <a:rPr>
+                <a:solidFill>
+                  <a:srgbClr val="657422"/>
+                </a:solidFill>
+                <a:latin typeface="Courier"/>
+              </a:rPr>
+              <a:t>mean_mm =</a:t>
+            </a:r>
+            <a:r>
+              <a:rPr>
+                <a:solidFill>
+                  <a:srgbClr val="003B4F"/>
+                </a:solidFill>
+                <a:latin typeface="Courier"/>
+              </a:rPr>
+              <a:t> </a:t>
+            </a:r>
+            <a:r>
+              <a:rPr>
+                <a:solidFill>
+                  <a:srgbClr val="4758AB"/>
+                </a:solidFill>
+                <a:latin typeface="Courier"/>
+              </a:rPr>
+              <a:t>round</a:t>
+            </a:r>
+            <a:r>
+              <a:rPr>
+                <a:solidFill>
+                  <a:srgbClr val="003B4F"/>
+                </a:solidFill>
+                <a:latin typeface="Courier"/>
+              </a:rPr>
+              <a:t>(</a:t>
+            </a:r>
+            <a:r>
+              <a:rPr>
+                <a:solidFill>
+                  <a:srgbClr val="4758AB"/>
+                </a:solidFill>
+                <a:latin typeface="Courier"/>
+              </a:rPr>
+              <a:t>mean</a:t>
+            </a:r>
+            <a:r>
+              <a:rPr>
+                <a:solidFill>
+                  <a:srgbClr val="003B4F"/>
+                </a:solidFill>
+                <a:latin typeface="Courier"/>
+              </a:rPr>
+              <a:t>(needle_length_mm, </a:t>
+            </a:r>
+            <a:r>
+              <a:rPr>
+                <a:solidFill>
+                  <a:srgbClr val="657422"/>
+                </a:solidFill>
+                <a:latin typeface="Courier"/>
+              </a:rPr>
+              <a:t>na.rm =</a:t>
+            </a:r>
+            <a:r>
+              <a:rPr>
+                <a:solidFill>
+                  <a:srgbClr val="003B4F"/>
+                </a:solidFill>
+                <a:latin typeface="Courier"/>
+              </a:rPr>
+              <a:t> </a:t>
+            </a:r>
+            <a:r>
+              <a:rPr>
+                <a:solidFill>
+                  <a:srgbClr val="8F5902"/>
+                </a:solidFill>
+                <a:latin typeface="Courier"/>
+              </a:rPr>
+              <a:t>TRUE</a:t>
+            </a:r>
+            <a:r>
+              <a:rPr>
+                <a:solidFill>
+                  <a:srgbClr val="003B4F"/>
+                </a:solidFill>
+                <a:latin typeface="Courier"/>
+              </a:rPr>
+              <a:t>), </a:t>
+            </a:r>
+            <a:r>
+              <a:rPr>
+                <a:solidFill>
+                  <a:srgbClr val="AD0000"/>
+                </a:solidFill>
+                <a:latin typeface="Courier"/>
+              </a:rPr>
+              <a:t>2</a:t>
+            </a:r>
+            <a:r>
+              <a:rPr>
+                <a:solidFill>
+                  <a:srgbClr val="003B4F"/>
+                </a:solidFill>
+                <a:latin typeface="Courier"/>
+              </a:rPr>
+              <a:t>),</a:t>
+            </a:r>
+            <a:br/>
+            <a:r>
+              <a:rPr>
+                <a:solidFill>
+                  <a:srgbClr val="003B4F"/>
+                </a:solidFill>
+                <a:latin typeface="Courier"/>
+              </a:rPr>
+              <a:t>    </a:t>
+            </a:r>
+            <a:r>
+              <a:rPr>
+                <a:solidFill>
+                  <a:srgbClr val="657422"/>
+                </a:solidFill>
+                <a:latin typeface="Courier"/>
+              </a:rPr>
+              <a:t>se_mm   =</a:t>
+            </a:r>
+            <a:r>
+              <a:rPr>
+                <a:solidFill>
+                  <a:srgbClr val="003B4F"/>
+                </a:solidFill>
+                <a:latin typeface="Courier"/>
+              </a:rPr>
+              <a:t> </a:t>
+            </a:r>
+            <a:r>
+              <a:rPr>
+                <a:solidFill>
+                  <a:srgbClr val="4758AB"/>
+                </a:solidFill>
+                <a:latin typeface="Courier"/>
+              </a:rPr>
+              <a:t>round</a:t>
+            </a:r>
+            <a:r>
+              <a:rPr>
+                <a:solidFill>
+                  <a:srgbClr val="003B4F"/>
+                </a:solidFill>
+                <a:latin typeface="Courier"/>
+              </a:rPr>
+              <a:t>(</a:t>
+            </a:r>
+            <a:r>
+              <a:rPr>
+                <a:solidFill>
+                  <a:srgbClr val="4758AB"/>
+                </a:solidFill>
+                <a:latin typeface="Courier"/>
+              </a:rPr>
+              <a:t>sd</a:t>
+            </a:r>
+            <a:r>
+              <a:rPr>
+                <a:solidFill>
+                  <a:srgbClr val="003B4F"/>
+                </a:solidFill>
+                <a:latin typeface="Courier"/>
+              </a:rPr>
+              <a:t>(needle_length_mm, </a:t>
+            </a:r>
+            <a:r>
+              <a:rPr>
+                <a:solidFill>
+                  <a:srgbClr val="657422"/>
+                </a:solidFill>
+                <a:latin typeface="Courier"/>
+              </a:rPr>
+              <a:t>na.rm =</a:t>
+            </a:r>
+            <a:r>
+              <a:rPr>
+                <a:solidFill>
+                  <a:srgbClr val="003B4F"/>
+                </a:solidFill>
+                <a:latin typeface="Courier"/>
+              </a:rPr>
+              <a:t> </a:t>
+            </a:r>
+            <a:r>
+              <a:rPr>
+                <a:solidFill>
+                  <a:srgbClr val="8F5902"/>
+                </a:solidFill>
+                <a:latin typeface="Courier"/>
+              </a:rPr>
+              <a:t>TRUE</a:t>
+            </a:r>
+            <a:r>
+              <a:rPr>
+                <a:solidFill>
+                  <a:srgbClr val="003B4F"/>
+                </a:solidFill>
+                <a:latin typeface="Courier"/>
+              </a:rPr>
+              <a:t>) </a:t>
+            </a:r>
+            <a:r>
+              <a:rPr>
+                <a:solidFill>
+                  <a:srgbClr val="5E5E5E"/>
+                </a:solidFill>
+                <a:latin typeface="Courier"/>
+              </a:rPr>
+              <a:t>/</a:t>
+            </a:r>
+            <a:r>
+              <a:rPr>
+                <a:solidFill>
+                  <a:srgbClr val="003B4F"/>
+                </a:solidFill>
+                <a:latin typeface="Courier"/>
+              </a:rPr>
+              <a:t> </a:t>
+            </a:r>
+            <a:r>
+              <a:rPr>
+                <a:solidFill>
+                  <a:srgbClr val="4758AB"/>
+                </a:solidFill>
+                <a:latin typeface="Courier"/>
+              </a:rPr>
+              <a:t>sqrt</a:t>
+            </a:r>
+            <a:r>
+              <a:rPr>
+                <a:solidFill>
+                  <a:srgbClr val="003B4F"/>
+                </a:solidFill>
+                <a:latin typeface="Courier"/>
+              </a:rPr>
+              <a:t>(n), </a:t>
+            </a:r>
+            <a:r>
+              <a:rPr>
+                <a:solidFill>
+                  <a:srgbClr val="AD0000"/>
+                </a:solidFill>
+                <a:latin typeface="Courier"/>
+              </a:rPr>
+              <a:t>2</a:t>
+            </a:r>
+            <a:r>
+              <a:rPr>
+                <a:solidFill>
+                  <a:srgbClr val="003B4F"/>
+                </a:solidFill>
+                <a:latin typeface="Courier"/>
+              </a:rPr>
+              <a:t>)</a:t>
+            </a:r>
+            <a:br/>
+            <a:r>
+              <a:rPr>
+                <a:solidFill>
+                  <a:srgbClr val="003B4F"/>
+                </a:solidFill>
+                <a:latin typeface="Courier"/>
+              </a:rPr>
+              <a:t>  )</a:t>
+            </a:r>
+            <a:br/>
+            <a:br/>
+            <a:r>
+              <a:rPr>
+                <a:solidFill>
+                  <a:srgbClr val="003B4F"/>
+                </a:solidFill>
+                <a:latin typeface="Courier"/>
+              </a:rPr>
+              <a:t>size_class_stats_df</a:t>
+            </a:r>
+          </a:p>
+          <a:p>
+            <a:pPr lvl="0" indent="0">
+              <a:buNone/>
+            </a:pPr>
+            <a:r>
+              <a:rPr>
+                <a:latin typeface="Courier"/>
+              </a:rPr>
+              <a:t># A tibble: 3 × 4
+  size_class     n mean_mm se_mm
+  &lt;chr&gt;      &lt;int&gt;   &lt;dbl&gt; &lt;dbl&gt;
+1 long          21    17.8  0.25
+2 medium        25    14.4  0.18
+3 short         18    11.4  0.31</a:t>
+            </a:r>
+          </a:p>
+        </p:txBody>
+      </p:sp>
+      <p:sp>
+        <p:nvSpPr>
+          <p:cNvPr id="4" name="Content Placeholder 3"/>
+          <p:cNvSpPr>
+            <a:spLocks noGrp="1"/>
+          </p:cNvSpPr>
+          <p:nvPr>
+            <p:ph idx="2" sz="half"/>
+          </p:nvPr>
+        </p:nvSpPr>
+        <p:spPr/>
+        <p:txBody>
+          <a:bodyPr/>
+          <a:lstStyle/>
+          <a:p>
+            <a:pPr lvl="0" indent="0" marL="1270000">
+              <a:buNone/>
+            </a:pPr>
+            <a:r>
+              <a:rPr sz="2000" b="1"/>
+              <a:t>Note</a:t>
+            </a:r>
+          </a:p>
+          <a:p>
+            <a:pPr lvl="0" indent="0" marL="1270000">
+              <a:buNone/>
+            </a:pPr>
+            <a:r>
+              <a:rPr sz="2000" b="1"/>
+              <a:t>✅ Key idea</a:t>
+            </a:r>
+          </a:p>
+          <a:p>
+            <a:pPr lvl="0" indent="0" marL="1270000">
+              <a:buNone/>
+            </a:pPr>
+            <a:r>
+              <a:rPr sz="2000">
+                <a:latin typeface="Courier"/>
+              </a:rPr>
+              <a:t>mutate()</a:t>
+            </a:r>
+            <a:r>
+              <a:rPr sz="2000"/>
+              <a:t> and </a:t>
+            </a:r>
+            <a:r>
+              <a:rPr sz="2000">
+                <a:latin typeface="Courier"/>
+              </a:rPr>
+              <a:t>group_by()</a:t>
+            </a:r>
+            <a:r>
+              <a:rPr sz="2000"/>
+              <a:t> + </a:t>
+            </a:r>
+            <a:r>
+              <a:rPr sz="2000">
+                <a:latin typeface="Courier"/>
+              </a:rPr>
+              <a:t>summarize()</a:t>
+            </a:r>
+            <a:r>
+              <a:rPr sz="2000"/>
+              <a:t> chain together like any other verbs — you don’t need to save the </a:t>
+            </a:r>
+            <a:r>
+              <a:rPr sz="2000">
+                <a:latin typeface="Courier"/>
+              </a:rPr>
+              <a:t>case_when()</a:t>
+            </a:r>
+            <a:r>
+              <a:rPr sz="2000"/>
+              <a:t> column separately first. This is the wrangling → describing pipeline in one block.</a:t>
+            </a:r>
+          </a:p>
+        </p:txBody>
+      </p:sp>
+    </p:spTree>
+  </p:cSld>
+</p:sld>
+</file>
+
+<file path=ppt/slides/slide37.xml><?xml version="1.0" encoding="utf-8"?>
+<p:sld xmlns:a="http://schemas.openxmlformats.org/drawingml/2006/main" xmlns:r="http://schemas.openxmlformats.org/officeDocument/2006/relationships" xmlns:p="http://schemas.openxmlformats.org/presentationml/2006/main">
+  <p:cSld>
+    <p:spTree>
+      <p:nvGrpSpPr>
+        <p:cNvPr id="1" name=""/>
+        <p:cNvGrpSpPr/>
+        <p:nvPr/>
+      </p:nvGrpSpPr>
+      <p:grpSpPr>
+        <a:xfrm>
+          <a:off x="0" y="0"/>
+          <a:ext cx="0" cy="0"/>
+          <a:chOff x="0" y="0"/>
+          <a:chExt cx="0" cy="0"/>
+        </a:xfrm>
+      </p:grpSpPr>
+      <p:sp>
+        <p:nvSpPr>
+          <p:cNvPr id="2" name="Title 1"/>
+          <p:cNvSpPr>
+            <a:spLocks noGrp="1"/>
+          </p:cNvSpPr>
+          <p:nvPr>
+            <p:ph type="title"/>
+          </p:nvPr>
+        </p:nvSpPr>
+        <p:spPr>
+          <a:xfrm>
+            <a:off x="0" y="0"/>
+            <a:ext cx="9144000" cy="602780"/>
+          </a:xfrm>
+          <a:solidFill>
+            <a:srgbClr val="70121D"/>
+          </a:solidFill>
+        </p:spPr>
+        <p:txBody>
+          <a:bodyPr/>
+          <a:lstStyle/>
+          <a:p>
+            <a:pPr lvl="0" indent="0" marL="0">
+              <a:buNone/>
+            </a:pPr>
+            <a:r>
+              <a:rPr/>
               <a:t>Wrap-up</a:t>
             </a:r>
           </a:p>
@@ -14400,6 +16089,29 @@
             </a:r>
           </a:p>
           <a:p>
+            <a:pPr lvl="0"/>
+            <a:r>
+              <a:rPr/>
+              <a:t>Learned to ask </a:t>
+            </a:r>
+            <a:r>
+              <a:rPr b="1"/>
+              <a:t>“n of what?”</a:t>
+            </a:r>
+            <a:r>
+              <a:rPr/>
+              <a:t>, and used a </a:t>
+            </a:r>
+            <a:r>
+              <a:rPr b="1"/>
+              <a:t>two-stage summary</a:t>
+            </a:r>
+            <a:r>
+              <a:rPr/>
+              <a:t> to report the n we actually replicated</a:t>
+            </a:r>
+          </a:p>
+          <a:p>
             <a:pPr lvl="0" indent="0" marL="1270000">
               <a:buNone/>
             </a:pPr>
@@ -14429,7 +16141,7 @@
               <a:rPr sz="2000">
                 <a:latin typeface="Courier"/>
               </a:rPr>
-              <a:t>length_mm</a:t>
+              <a:t>needle_length_mm</a:t>
             </a:r>
             <a:r>
               <a:rPr sz="2000"/>
@@ -14439,7 +16151,7 @@
               <a:rPr sz="2000">
                 <a:latin typeface="Courier"/>
               </a:rPr>
-              <a:t>n_s</a:t>
+              <a:t>side</a:t>
             </a:r>
             <a:r>
               <a:rPr sz="2000"/>
@@ -14449,7 +16161,7 @@
               <a:rPr sz="2000">
                 <a:latin typeface="Courier"/>
               </a:rPr>
-              <a:t>group</a:t>
+              <a:t>team</a:t>
             </a:r>
             <a:r>
               <a:rPr sz="2000"/>
@@ -14544,7 +16256,7 @@
 </p:sld>
 </file>
 
-<file path=ppt/slides/slide34.xml><?xml version="1.0" encoding="utf-8"?>
+<file path=ppt/slides/slide38.xml><?xml version="1.0" encoding="utf-8"?>
 <p:sld xmlns:a="http://schemas.openxmlformats.org/drawingml/2006/main" xmlns:r="http://schemas.openxmlformats.org/officeDocument/2006/relationships" xmlns:p="http://schemas.openxmlformats.org/presentationml/2006/main">
   <p:cSld>
     <p:spTree>
@@ -14955,7 +16667,7 @@
                 </a:solidFill>
                 <a:latin typeface="Courier"/>
               </a:rPr>
-              <a:t>"data/pine_needles.csv"</a:t>
+              <a:t>"data/pine_data.csv"</a:t>
             </a:r>
             <a:r>
               <a:rPr>
@@ -14965,6 +16677,17 @@
                 <a:latin typeface="Courier"/>
               </a:rPr>
               <a:t>)</a:t>
+            </a:r>
+          </a:p>
+          <a:p>
+            <a:pPr lvl="0" indent="0" marL="0">
+              <a:buNone/>
+            </a:pPr>
+            <a:r>
+              <a:rPr>
+                <a:hlinkClick r:id="rId2"/>
+              </a:rPr>
+              <a:t>📥 Download the data</a:t>
             </a:r>
           </a:p>
           <a:p>
@@ -14993,37 +16716,37 @@
               <a:rPr sz="2000">
                 <a:latin typeface="Courier"/>
               </a:rPr>
-              <a:t>n_s</a:t>
+              <a:t>side</a:t>
             </a:r>
             <a:r>
               <a:rPr sz="2000"/>
-              <a:t> codes shady (</a:t>
+              <a:t> is </a:t>
             </a:r>
             <a:r>
               <a:rPr sz="2000">
                 <a:latin typeface="Courier"/>
               </a:rPr>
-              <a:t>n</a:t>
+              <a:t>"shady"</a:t>
             </a:r>
             <a:r>
               <a:rPr sz="2000"/>
-              <a:t>) vs. sunny (</a:t>
+              <a:t> or </a:t>
             </a:r>
             <a:r>
               <a:rPr sz="2000">
                 <a:latin typeface="Courier"/>
               </a:rPr>
-              <a:t>s</a:t>
+              <a:t>"sunny"</a:t>
             </a:r>
             <a:r>
               <a:rPr sz="2000"/>
-              <a:t>); </a:t>
+              <a:t>; </a:t>
             </a:r>
             <a:r>
               <a:rPr sz="2000">
                 <a:latin typeface="Courier"/>
               </a:rPr>
-              <a:t>group</a:t>
+              <a:t>team</a:t>
             </a:r>
             <a:r>
               <a:rPr sz="2000"/>
@@ -15032,7 +16755,7 @@
             <a:br/>
             <a:r>
               <a:rPr sz="2000"/>
-              <a:t>Four teams, four trees, six needles per side.</a:t>
+              <a:t>Four teams, four trees, eight needles per side — 64 rows, but only 4 trees.</a:t>
             </a:r>
           </a:p>
         </p:txBody>
@@ -15419,7 +17142,7 @@
                 </a:solidFill>
                 <a:latin typeface="Courier"/>
               </a:rPr>
-              <a:t>(n_s </a:t>
+              <a:t>(side </a:t>
             </a:r>
             <a:r>
               <a:rPr>
@@ -15446,7 +17169,7 @@
                 </a:solidFill>
                 <a:latin typeface="Courier"/>
               </a:rPr>
-              <a:t>"n"</a:t>
+              <a:t>"shady"</a:t>
             </a:r>
             <a:r>
               <a:rPr>
@@ -15492,7 +17215,7 @@
                 </a:solidFill>
                 <a:latin typeface="Courier"/>
               </a:rPr>
-              <a:t>(length_mm)</a:t>
+              <a:t>(needle_length_mm)</a:t>
             </a:r>
             <a:br/>
             <a:br/>
@@ -15514,7 +17237,9 @@
               <a:rPr>
                 <a:latin typeface="Courier"/>
               </a:rPr>
-              <a:t> [1] 20 21 23 25 21 16 19 18 20 23 21 18 20 21 23 25 21 16 19 18 20 23 21 18</a:t>
+              <a:t> [1] 16.61 16.95 14.32 15.60 15.12 13.06 17.93 13.46 16.46 20.71 17.59 15.11
+[13] 17.62 15.34 14.79 11.55 11.54 14.01 12.97 12.93 17.72 14.30 11.76 10.56
+[25] 10.54  7.23 11.64 13.36 15.07 11.70 11.26 13.06</a:t>
             </a:r>
           </a:p>
           <a:p>
@@ -15548,7 +17273,7 @@
               <a:rPr>
                 <a:latin typeface="Courier"/>
               </a:rPr>
-              <a:t>[1] 20.41667</a:t>
+              <a:t>[1] 14.12094</a:t>
             </a:r>
           </a:p>
           <a:p>
@@ -15986,7 +17711,7 @@
                 </a:solidFill>
                 <a:latin typeface="Courier"/>
               </a:rPr>
-              <a:t>(n_s </a:t>
+              <a:t>(side </a:t>
             </a:r>
             <a:r>
               <a:rPr>
@@ -16013,7 +17738,7 @@
                 </a:solidFill>
                 <a:latin typeface="Courier"/>
               </a:rPr>
-              <a:t>"s"</a:t>
+              <a:t>"sunny"</a:t>
             </a:r>
             <a:r>
               <a:rPr>
@@ -16059,7 +17784,7 @@
                 </a:solidFill>
                 <a:latin typeface="Courier"/>
               </a:rPr>
-              <a:t>(length_mm)</a:t>
+              <a:t>(needle_length_mm)</a:t>
             </a:r>
             <a:br/>
             <a:br/>
@@ -16090,7 +17815,7 @@
               <a:rPr>
                 <a:latin typeface="Courier"/>
               </a:rPr>
-              <a:t>[1] 20.5</a:t>
+              <a:t>[1] 14.155</a:t>
             </a:r>
           </a:p>
           <a:p>
@@ -16124,7 +17849,7 @@
               <a:rPr>
                 <a:latin typeface="Courier"/>
               </a:rPr>
-              <a:t>[1] 15</a:t>
+              <a:t>[1] 15.37</a:t>
             </a:r>
           </a:p>
           <a:p>

--- a/docs/content/descriptive_stats/descriptive_stats_lecture.pptx
+++ b/docs/content/descriptive_stats/descriptive_stats_lecture.pptx
@@ -44,7 +44,6 @@
     <p:sldId id="292" r:id="rId38"/>
     <p:sldId id="293" r:id="rId39"/>
     <p:sldId id="294" r:id="rId40"/>
-    <p:sldId id="295" r:id="rId41"/>
   </p:sldIdLst>
   <p:sldSz cx="9144000" cy="5143500" type="screen16x9"/>
   <p:notesSz cx="6858000" cy="9144000"/>
@@ -19738,199 +19737,6 @@
 </p:sld>
 </file>
 
-<file path=ppt/slides/slide40.xml><?xml version="1.0" encoding="utf-8"?>
-<p:sld xmlns:a="http://schemas.openxmlformats.org/drawingml/2006/main" xmlns:r="http://schemas.openxmlformats.org/officeDocument/2006/relationships" xmlns:p="http://schemas.openxmlformats.org/presentationml/2006/main">
-  <p:cSld>
-    <p:spTree>
-      <p:nvGrpSpPr>
-        <p:cNvPr id="1" name=""/>
-        <p:cNvGrpSpPr/>
-        <p:nvPr/>
-      </p:nvGrpSpPr>
-      <p:grpSpPr>
-        <a:xfrm>
-          <a:off x="0" y="0"/>
-          <a:ext cx="0" cy="0"/>
-          <a:chOff x="0" y="0"/>
-          <a:chExt cx="0" cy="0"/>
-        </a:xfrm>
-      </p:grpSpPr>
-      <p:sp>
-        <p:nvSpPr>
-          <p:cNvPr id="2" name="Title 1"/>
-          <p:cNvSpPr>
-            <a:spLocks noGrp="1"/>
-          </p:cNvSpPr>
-          <p:nvPr>
-            <p:ph type="title"/>
-          </p:nvPr>
-        </p:nvSpPr>
-        <p:spPr>
-          <a:xfrm>
-            <a:off x="0" y="0"/>
-            <a:ext cx="9144000" cy="582780"/>
-          </a:xfrm>
-        </p:spPr>
-        <p:txBody>
-          <a:bodyPr/>
-          <a:lstStyle/>
-          <a:p>
-            <a:pPr lvl="0" indent="0" marL="0">
-              <a:buNone/>
-            </a:pPr>
-            <a:r>
-              <a:rPr/>
-              <a:t>Getting unstuck</a:t>
-            </a:r>
-          </a:p>
-        </p:txBody>
-      </p:sp>
-      <p:sp>
-        <p:nvSpPr>
-          <p:cNvPr id="3" name="Content Placeholder 2"/>
-          <p:cNvSpPr>
-            <a:spLocks noGrp="1"/>
-          </p:cNvSpPr>
-          <p:nvPr>
-            <p:ph idx="1"/>
-          </p:nvPr>
-        </p:nvSpPr>
-        <p:spPr/>
-        <p:txBody>
-          <a:bodyPr/>
-          <a:lstStyle/>
-          <a:p>
-            <a:pPr lvl="0" indent="0" marL="0">
-              <a:buNone/>
-            </a:pPr>
-            <a:r>
-              <a:rPr/>
-              <a:t>When code breaks — and it will, that is normal:</a:t>
-            </a:r>
-          </a:p>
-          <a:p>
-            <a:pPr lvl="0" indent="-342900" marL="342900">
-              <a:buAutoNum type="arabicPeriod"/>
-            </a:pPr>
-            <a:r>
-              <a:rPr/>
-              <a:t>Read the </a:t>
-            </a:r>
-            <a:r>
-              <a:rPr b="1"/>
-              <a:t>error message</a:t>
-            </a:r>
-            <a:r>
-              <a:rPr/>
-              <a:t> out loud; it usually names the line</a:t>
-            </a:r>
-          </a:p>
-          <a:p>
-            <a:pPr lvl="0" indent="-342900" marL="342900">
-              <a:buAutoNum type="arabicPeriod"/>
-            </a:pPr>
-            <a:r>
-              <a:rPr/>
-              <a:t>Check the usual suspects: </a:t>
-            </a:r>
-            <a:r>
-              <a:rPr>
-                <a:latin typeface="Courier"/>
-              </a:rPr>
-              <a:t>library(tidyverse)</a:t>
-            </a:r>
-            <a:r>
-              <a:rPr/>
-              <a:t> loaded? Spelling? Did you forget </a:t>
-            </a:r>
-            <a:r>
-              <a:rPr>
-                <a:latin typeface="Courier"/>
-              </a:rPr>
-              <a:t>na.rm = TRUE</a:t>
-            </a:r>
-            <a:r>
-              <a:rPr/>
-              <a:t>?</a:t>
-            </a:r>
-          </a:p>
-          <a:p>
-            <a:pPr lvl="0" indent="-342900" marL="342900">
-              <a:buAutoNum type="arabicPeriod"/>
-            </a:pPr>
-            <a:r>
-              <a:rPr>
-                <a:latin typeface="Courier"/>
-              </a:rPr>
-              <a:t>?function_name</a:t>
-            </a:r>
-            <a:r>
-              <a:rPr/>
-              <a:t> opens the help page</a:t>
-            </a:r>
-          </a:p>
-          <a:p>
-            <a:pPr lvl="0" indent="-342900" marL="342900">
-              <a:buAutoNum type="arabicPeriod"/>
-            </a:pPr>
-            <a:r>
-              <a:rPr/>
-              <a:t>Bring the </a:t>
-            </a:r>
-            <a:r>
-              <a:rPr b="1"/>
-              <a:t>exact error</a:t>
-            </a:r>
-            <a:r>
-              <a:rPr/>
-              <a:t> (copy-paste it) to class or office hours</a:t>
-            </a:r>
-          </a:p>
-          <a:p>
-            <a:pPr lvl="0" indent="0" marL="0">
-              <a:buNone/>
-            </a:pPr>
-            <a:r>
-              <a:rPr>
-                <a:hlinkClick r:id="rId2"/>
-              </a:rPr>
-              <a:t>📖 R4DS §8 — Workflow: getting help</a:t>
-            </a:r>
-          </a:p>
-          <a:p>
-            <a:pPr lvl="0" indent="0" marL="1270000">
-              <a:buNone/>
-            </a:pPr>
-            <a:r>
-              <a:rPr sz="2000" b="1"/>
-              <a:t>Note</a:t>
-            </a:r>
-          </a:p>
-          <a:p>
-            <a:pPr lvl="0" indent="0" marL="1270000">
-              <a:buNone/>
-            </a:pPr>
-            <a:r>
-              <a:rPr sz="2000" b="1"/>
-              <a:t>✅ Key idea</a:t>
-            </a:r>
-          </a:p>
-          <a:p>
-            <a:pPr lvl="0" indent="0" marL="1270000">
-              <a:buNone/>
-            </a:pPr>
-            <a:r>
-              <a:rPr sz="2000"/>
-              <a:t>Every working scientist googles error messages daily. Getting stuck is not failing — it is the job.</a:t>
-            </a:r>
-          </a:p>
-        </p:txBody>
-      </p:sp>
-    </p:spTree>
-  </p:cSld>
-</p:sld>
-</file>
-
 <file path=ppt/slides/slide5.xml><?xml version="1.0" encoding="utf-8"?>
 <p:sld xmlns:a="http://schemas.openxmlformats.org/drawingml/2006/main" xmlns:r="http://schemas.openxmlformats.org/officeDocument/2006/relationships" xmlns:p="http://schemas.openxmlformats.org/presentationml/2006/main">
   <p:cSld>
